--- a/Mapped Curriculum Lessons/Grade 7/Lesson 22 - List Positions and Updates/List Positions and Updates - Slides.pptx
+++ b/Mapped Curriculum Lessons/Grade 7/Lesson 22 - List Positions and Updates/List Positions and Updates - Slides.pptx
@@ -2,28 +2,28 @@
 <file path=ppt/presentation.xml><?xml version="1.0" encoding="utf-8"?>
 <p:presentation xmlns:p="http://schemas.openxmlformats.org/presentationml/2006/main" embedTrueTypeFonts="1" saveSubsetFonts="0">
   <p:sldMasterIdLst>
-    <p:sldMasterId xmlns:r="http://schemas.openxmlformats.org/officeDocument/2006/relationships" id="2147483648" r:id="R79af4f50fcc84aef"/>
+    <p:sldMasterId xmlns:r="http://schemas.openxmlformats.org/officeDocument/2006/relationships" id="2147483648" r:id="Ra09874f192a848e0"/>
   </p:sldMasterIdLst>
   <p:notesMasterIdLst>
-    <p:notesMasterId xmlns:r="http://schemas.openxmlformats.org/officeDocument/2006/relationships" r:id="R5cac84e517934846"/>
+    <p:notesMasterId xmlns:r="http://schemas.openxmlformats.org/officeDocument/2006/relationships" r:id="Re93b4474dce64a3e"/>
   </p:notesMasterIdLst>
   <p:sldIdLst>
-    <p:sldId xmlns:r="http://schemas.openxmlformats.org/officeDocument/2006/relationships" id="256" r:id="R8c67bf1dbb40402c"/>
-    <p:sldId xmlns:r="http://schemas.openxmlformats.org/officeDocument/2006/relationships" id="257" r:id="R53dac919406b4b34"/>
-    <p:sldId xmlns:r="http://schemas.openxmlformats.org/officeDocument/2006/relationships" id="258" r:id="Rac98a918454a4804"/>
-    <p:sldId xmlns:r="http://schemas.openxmlformats.org/officeDocument/2006/relationships" id="259" r:id="R909cf8fae02b4dac"/>
-    <p:sldId xmlns:r="http://schemas.openxmlformats.org/officeDocument/2006/relationships" id="260" r:id="Rd38a4207566744ce"/>
-    <p:sldId xmlns:r="http://schemas.openxmlformats.org/officeDocument/2006/relationships" id="261" r:id="R0d83a2d69c224fbe"/>
-    <p:sldId xmlns:r="http://schemas.openxmlformats.org/officeDocument/2006/relationships" id="262" r:id="Rb325a03eedde4329"/>
-    <p:sldId xmlns:r="http://schemas.openxmlformats.org/officeDocument/2006/relationships" id="263" r:id="R19b287af3b2f4d73"/>
-    <p:sldId xmlns:r="http://schemas.openxmlformats.org/officeDocument/2006/relationships" id="264" r:id="R9463ad8b293344bb"/>
+    <p:sldId xmlns:r="http://schemas.openxmlformats.org/officeDocument/2006/relationships" id="256" r:id="R97ab9f386c654c04"/>
+    <p:sldId xmlns:r="http://schemas.openxmlformats.org/officeDocument/2006/relationships" id="257" r:id="R237c8370fa07425c"/>
+    <p:sldId xmlns:r="http://schemas.openxmlformats.org/officeDocument/2006/relationships" id="258" r:id="Rc24f89c4f69c4331"/>
+    <p:sldId xmlns:r="http://schemas.openxmlformats.org/officeDocument/2006/relationships" id="259" r:id="R4e721b55c8884831"/>
+    <p:sldId xmlns:r="http://schemas.openxmlformats.org/officeDocument/2006/relationships" id="260" r:id="Re4d925be57e44fb4"/>
+    <p:sldId xmlns:r="http://schemas.openxmlformats.org/officeDocument/2006/relationships" id="261" r:id="R320e1d6ed9bc4915"/>
+    <p:sldId xmlns:r="http://schemas.openxmlformats.org/officeDocument/2006/relationships" id="262" r:id="R6cd3f2f7243f428f"/>
+    <p:sldId xmlns:r="http://schemas.openxmlformats.org/officeDocument/2006/relationships" id="263" r:id="Rb14d5f2c04914962"/>
+    <p:sldId xmlns:r="http://schemas.openxmlformats.org/officeDocument/2006/relationships" id="264" r:id="R685d9c0b6b554404"/>
   </p:sldIdLst>
   <p:sldSz cx="12192000" cy="6858000"/>
   <p:notesSz cx="6858000" cy="9144000"/>
   <p:embeddedFontLst>
     <p:embeddedFont>
       <p:font typeface="JetBrains Mono"/>
-      <p:regular xmlns:r="http://schemas.openxmlformats.org/officeDocument/2006/relationships" r:id="R3baca85b8d8a41c5"/>
+      <p:regular xmlns:r="http://schemas.openxmlformats.org/officeDocument/2006/relationships" r:id="Ra62594b4d84045e0"/>
     </p:embeddedFont>
   </p:embeddedFontLst>
 </p:presentation>
@@ -1071,7 +1071,7 @@
           <p:nvPr/>
         </p:nvPicPr>
         <p:blipFill rotWithShape="1">
-          <a:blip xmlns:r="http://schemas.openxmlformats.org/officeDocument/2006/relationships" xmlns:a="http://schemas.openxmlformats.org/drawingml/2006/main" r:embed="Rfec4b6b0ddba40d5"/>
+          <a:blip xmlns:r="http://schemas.openxmlformats.org/officeDocument/2006/relationships" xmlns:a="http://schemas.openxmlformats.org/drawingml/2006/main" r:embed="R436d227cbdda42ed"/>
           <a:stretch xmlns:a="http://schemas.openxmlformats.org/drawingml/2006/main"/>
         </p:blipFill>
         <p:spPr>
@@ -1451,7 +1451,7 @@
           <p:nvPr/>
         </p:nvPicPr>
         <p:blipFill rotWithShape="1">
-          <a:blip xmlns:r="http://schemas.openxmlformats.org/officeDocument/2006/relationships" xmlns:a="http://schemas.openxmlformats.org/drawingml/2006/main" r:embed="R70f82dc809d34946">
+          <a:blip xmlns:r="http://schemas.openxmlformats.org/officeDocument/2006/relationships" xmlns:a="http://schemas.openxmlformats.org/drawingml/2006/main" r:embed="R5c1902736c1646bd">
             <a:alphaModFix amt="28000"/>
           </a:blip>
           <a:stretch xmlns:a="http://schemas.openxmlformats.org/drawingml/2006/main"/>
@@ -1664,7 +1664,7 @@
           <p:nvPr/>
         </p:nvPicPr>
         <p:blipFill rotWithShape="1">
-          <a:blip xmlns:r="http://schemas.openxmlformats.org/officeDocument/2006/relationships" xmlns:a="http://schemas.openxmlformats.org/drawingml/2006/main" r:embed="R611098b289154d1d">
+          <a:blip xmlns:r="http://schemas.openxmlformats.org/officeDocument/2006/relationships" xmlns:a="http://schemas.openxmlformats.org/drawingml/2006/main" r:embed="R6416d759f4434a05">
             <a:alphaModFix amt="28000"/>
           </a:blip>
           <a:stretch xmlns:a="http://schemas.openxmlformats.org/drawingml/2006/main"/>
@@ -1899,7 +1899,7 @@
           <p:nvPr/>
         </p:nvPicPr>
         <p:blipFill rotWithShape="1">
-          <a:blip xmlns:r="http://schemas.openxmlformats.org/officeDocument/2006/relationships" xmlns:a="http://schemas.openxmlformats.org/drawingml/2006/main" r:embed="Re22ff9ea5d6141f1">
+          <a:blip xmlns:r="http://schemas.openxmlformats.org/officeDocument/2006/relationships" xmlns:a="http://schemas.openxmlformats.org/drawingml/2006/main" r:embed="R6d3f22953c4946e7">
             <a:alphaModFix amt="28000"/>
           </a:blip>
           <a:stretch xmlns:a="http://schemas.openxmlformats.org/drawingml/2006/main"/>
@@ -2176,7 +2176,7 @@
           <p:nvPr/>
         </p:nvPicPr>
         <p:blipFill rotWithShape="1">
-          <a:blip xmlns:r="http://schemas.openxmlformats.org/officeDocument/2006/relationships" xmlns:a="http://schemas.openxmlformats.org/drawingml/2006/main" r:embed="Rcdbcf85c28574dde">
+          <a:blip xmlns:r="http://schemas.openxmlformats.org/officeDocument/2006/relationships" xmlns:a="http://schemas.openxmlformats.org/drawingml/2006/main" r:embed="Ra0a0e3931a304628">
             <a:alphaModFix amt="28000"/>
           </a:blip>
           <a:stretch xmlns:a="http://schemas.openxmlformats.org/drawingml/2006/main"/>
@@ -2451,7 +2451,7 @@
           <p:nvPr/>
         </p:nvPicPr>
         <p:blipFill rotWithShape="1">
-          <a:blip xmlns:r="http://schemas.openxmlformats.org/officeDocument/2006/relationships" xmlns:a="http://schemas.openxmlformats.org/drawingml/2006/main" r:embed="Rb123baa085e648f5">
+          <a:blip xmlns:r="http://schemas.openxmlformats.org/officeDocument/2006/relationships" xmlns:a="http://schemas.openxmlformats.org/drawingml/2006/main" r:embed="Re1635f18ae904cbb">
             <a:alphaModFix amt="28000"/>
           </a:blip>
           <a:stretch xmlns:a="http://schemas.openxmlformats.org/drawingml/2006/main"/>
@@ -2875,7 +2875,7 @@
           <p:nvPr/>
         </p:nvPicPr>
         <p:blipFill rotWithShape="1">
-          <a:blip xmlns:r="http://schemas.openxmlformats.org/officeDocument/2006/relationships" xmlns:a="http://schemas.openxmlformats.org/drawingml/2006/main" r:embed="R67abce75cc034cac">
+          <a:blip xmlns:r="http://schemas.openxmlformats.org/officeDocument/2006/relationships" xmlns:a="http://schemas.openxmlformats.org/drawingml/2006/main" r:embed="R6a3fc1a9374c4c3c">
             <a:alphaModFix amt="28000"/>
           </a:blip>
           <a:stretch xmlns:a="http://schemas.openxmlformats.org/drawingml/2006/main"/>
@@ -3016,7 +3016,7 @@
           <p:nvPr/>
         </p:nvPicPr>
         <p:blipFill rotWithShape="1">
-          <a:blip xmlns:r="http://schemas.openxmlformats.org/officeDocument/2006/relationships" xmlns:a="http://schemas.openxmlformats.org/drawingml/2006/main" r:embed="Rb042a4076dd5458e">
+          <a:blip xmlns:r="http://schemas.openxmlformats.org/officeDocument/2006/relationships" xmlns:a="http://schemas.openxmlformats.org/drawingml/2006/main" r:embed="Rdabe1043cfbc4ee7">
             <a:alphaModFix amt="28000"/>
           </a:blip>
           <a:stretch xmlns:a="http://schemas.openxmlformats.org/drawingml/2006/main"/>
@@ -3130,7 +3130,7 @@
           <p:nvPr/>
         </p:nvPicPr>
         <p:blipFill rotWithShape="1">
-          <a:blip xmlns:r="http://schemas.openxmlformats.org/officeDocument/2006/relationships" xmlns:a="http://schemas.openxmlformats.org/drawingml/2006/main" r:embed="R9893264ae4834fbf">
+          <a:blip xmlns:r="http://schemas.openxmlformats.org/officeDocument/2006/relationships" xmlns:a="http://schemas.openxmlformats.org/drawingml/2006/main" r:embed="R9079f31d4f9941ef">
             <a:alphaModFix amt="28000"/>
           </a:blip>
           <a:stretch xmlns:a="http://schemas.openxmlformats.org/drawingml/2006/main"/>
@@ -3457,7 +3457,7 @@
           <p:nvPr/>
         </p:nvPicPr>
         <p:blipFill rotWithShape="1">
-          <a:blip xmlns:r="http://schemas.openxmlformats.org/officeDocument/2006/relationships" xmlns:a="http://schemas.openxmlformats.org/drawingml/2006/main" r:embed="Rda1f3402fd1b414b">
+          <a:blip xmlns:r="http://schemas.openxmlformats.org/officeDocument/2006/relationships" xmlns:a="http://schemas.openxmlformats.org/drawingml/2006/main" r:embed="R99e2641a7f1f4c69">
             <a:alphaModFix amt="28000"/>
           </a:blip>
           <a:stretch xmlns:a="http://schemas.openxmlformats.org/drawingml/2006/main"/>
@@ -3745,7 +3745,7 @@
           <p:nvPr/>
         </p:nvPicPr>
         <p:blipFill rotWithShape="1">
-          <a:blip xmlns:r="http://schemas.openxmlformats.org/officeDocument/2006/relationships" xmlns:a="http://schemas.openxmlformats.org/drawingml/2006/main" r:embed="R6ff8e9461b914f4f">
+          <a:blip xmlns:r="http://schemas.openxmlformats.org/officeDocument/2006/relationships" xmlns:a="http://schemas.openxmlformats.org/drawingml/2006/main" r:embed="R371b27320b9e4e07">
             <a:alphaModFix amt="28000"/>
           </a:blip>
           <a:stretch xmlns:a="http://schemas.openxmlformats.org/drawingml/2006/main"/>
@@ -3982,17 +3982,17 @@
   </p:cSld>
   <p:clrMap bg1="lt1" tx1="dk1" bg2="lt2" tx2="dk2" accent1="accent1" accent2="accent2" accent3="accent3" accent4="accent4" accent5="accent5" accent6="accent6" hlink="hlink" folHlink="folHlink"/>
   <p:sldLayoutIdLst>
-    <p:sldLayoutId xmlns:r="http://schemas.openxmlformats.org/officeDocument/2006/relationships" id="2147483649" r:id="R901dc95c18b9421f"/>
-    <p:sldLayoutId xmlns:r="http://schemas.openxmlformats.org/officeDocument/2006/relationships" id="2147483650" r:id="R4ccb5894bcd04be4"/>
-    <p:sldLayoutId xmlns:r="http://schemas.openxmlformats.org/officeDocument/2006/relationships" id="2147483651" r:id="Ra95dcb8a05d647f3"/>
-    <p:sldLayoutId xmlns:r="http://schemas.openxmlformats.org/officeDocument/2006/relationships" id="2147483652" r:id="R432dfe83f4754a32"/>
-    <p:sldLayoutId xmlns:r="http://schemas.openxmlformats.org/officeDocument/2006/relationships" id="2147483653" r:id="Rb4a9bb3692cb48f2"/>
-    <p:sldLayoutId xmlns:r="http://schemas.openxmlformats.org/officeDocument/2006/relationships" id="2147483654" r:id="R21b85d062f25458c"/>
-    <p:sldLayoutId xmlns:r="http://schemas.openxmlformats.org/officeDocument/2006/relationships" id="2147483655" r:id="R5077ebe9fba246b9"/>
-    <p:sldLayoutId xmlns:r="http://schemas.openxmlformats.org/officeDocument/2006/relationships" id="2147483656" r:id="R1fc256869a8d4c98"/>
-    <p:sldLayoutId xmlns:r="http://schemas.openxmlformats.org/officeDocument/2006/relationships" id="2147483657" r:id="R696b9b22473e4cee"/>
-    <p:sldLayoutId xmlns:r="http://schemas.openxmlformats.org/officeDocument/2006/relationships" id="2147483658" r:id="R0ebf0688a27b406a"/>
-    <p:sldLayoutId xmlns:r="http://schemas.openxmlformats.org/officeDocument/2006/relationships" id="2147483659" r:id="R0a42d8b68db24193"/>
+    <p:sldLayoutId xmlns:r="http://schemas.openxmlformats.org/officeDocument/2006/relationships" id="2147483649" r:id="R523530dc620f4e5d"/>
+    <p:sldLayoutId xmlns:r="http://schemas.openxmlformats.org/officeDocument/2006/relationships" id="2147483650" r:id="R64b429e034fa44f7"/>
+    <p:sldLayoutId xmlns:r="http://schemas.openxmlformats.org/officeDocument/2006/relationships" id="2147483651" r:id="Rb64a1f451cdc45e8"/>
+    <p:sldLayoutId xmlns:r="http://schemas.openxmlformats.org/officeDocument/2006/relationships" id="2147483652" r:id="Rf11c87fbfec846da"/>
+    <p:sldLayoutId xmlns:r="http://schemas.openxmlformats.org/officeDocument/2006/relationships" id="2147483653" r:id="Rd169805deeb44618"/>
+    <p:sldLayoutId xmlns:r="http://schemas.openxmlformats.org/officeDocument/2006/relationships" id="2147483654" r:id="R5d16636d2c594389"/>
+    <p:sldLayoutId xmlns:r="http://schemas.openxmlformats.org/officeDocument/2006/relationships" id="2147483655" r:id="Ra91918dcf62a49ba"/>
+    <p:sldLayoutId xmlns:r="http://schemas.openxmlformats.org/officeDocument/2006/relationships" id="2147483656" r:id="R232b9b4731154751"/>
+    <p:sldLayoutId xmlns:r="http://schemas.openxmlformats.org/officeDocument/2006/relationships" id="2147483657" r:id="Rbf053fa394f04635"/>
+    <p:sldLayoutId xmlns:r="http://schemas.openxmlformats.org/officeDocument/2006/relationships" id="2147483658" r:id="Rc756c6d29929406c"/>
+    <p:sldLayoutId xmlns:r="http://schemas.openxmlformats.org/officeDocument/2006/relationships" id="2147483659" r:id="R23d3ba3bf2ec4464"/>
   </p:sldLayoutIdLst>
   <p:hf hdr="0" ftr="0" dt="0"/>
   <p:txStyles>
@@ -7505,18 +7505,18 @@
                 <a:ea typeface="Calibri"/>
                 <a:cs typeface="Calibri"/>
               </a:rPr>
-              <a:t>Replace the item at position 2 with </a:t>
+              <a:t>Replace the item at position 2 with scissors. The final </a:t>
             </a:r>
             <a:r>
               <a:rPr sz="2400" b="0">
                 <a:solidFill>
-                  <a:srgbClr val="067D17"/>
-                </a:solidFill>
-                <a:latin typeface="JetBrains Mono"/>
-                <a:ea typeface="JetBrains Mono"/>
-                <a:cs typeface="JetBrains Mono"/>
-              </a:rPr>
-              <a:t>"scissors"</a:t>
+                  <a:srgbClr val="1750EB"/>
+                </a:solidFill>
+                <a:latin typeface="JetBrains Mono"/>
+                <a:ea typeface="JetBrains Mono"/>
+                <a:cs typeface="JetBrains Mono"/>
+              </a:rPr>
+              <a:t>list</a:t>
             </a:r>
             <a:r>
               <a:rPr sz="2400" b="0">
@@ -7527,95 +7527,7 @@
                 <a:ea typeface="Calibri"/>
                 <a:cs typeface="Calibri"/>
               </a:rPr>
-              <a:t>. The final </a:t>
-            </a:r>
-            <a:r>
-              <a:rPr sz="2400" b="0">
-                <a:solidFill>
-                  <a:srgbClr val="1750EB"/>
-                </a:solidFill>
-                <a:latin typeface="JetBrains Mono"/>
-                <a:ea typeface="JetBrains Mono"/>
-                <a:cs typeface="JetBrains Mono"/>
-              </a:rPr>
-              <a:t>list</a:t>
-            </a:r>
-            <a:r>
-              <a:rPr sz="2400" b="0">
-                <a:solidFill>
-                  <a:srgbClr val="080808"/>
-                </a:solidFill>
-                <a:latin typeface="Calibri"/>
-                <a:ea typeface="Calibri"/>
-                <a:cs typeface="Calibri"/>
-              </a:rPr>
-              <a:t> must display </a:t>
-            </a:r>
-            <a:r>
-              <a:rPr sz="2400" b="0">
-                <a:solidFill>
-                  <a:srgbClr val="067D17"/>
-                </a:solidFill>
-                <a:latin typeface="JetBrains Mono"/>
-                <a:ea typeface="JetBrains Mono"/>
-                <a:cs typeface="JetBrains Mono"/>
-              </a:rPr>
-              <a:t>"pencil"</a:t>
-            </a:r>
-            <a:r>
-              <a:rPr sz="2400" b="0">
-                <a:solidFill>
-                  <a:srgbClr val="080808"/>
-                </a:solidFill>
-                <a:latin typeface="Calibri"/>
-                <a:ea typeface="Calibri"/>
-                <a:cs typeface="Calibri"/>
-              </a:rPr>
-              <a:t>, </a:t>
-            </a:r>
-            <a:r>
-              <a:rPr sz="2400" b="0">
-                <a:solidFill>
-                  <a:srgbClr val="067D17"/>
-                </a:solidFill>
-                <a:latin typeface="JetBrains Mono"/>
-                <a:ea typeface="JetBrains Mono"/>
-                <a:cs typeface="JetBrains Mono"/>
-              </a:rPr>
-              <a:t>"book"</a:t>
-            </a:r>
-            <a:r>
-              <a:rPr sz="2400" b="0">
-                <a:solidFill>
-                  <a:srgbClr val="080808"/>
-                </a:solidFill>
-                <a:latin typeface="Calibri"/>
-                <a:ea typeface="Calibri"/>
-                <a:cs typeface="Calibri"/>
-              </a:rPr>
-              <a:t> and </a:t>
-            </a:r>
-            <a:r>
-              <a:rPr sz="2400" b="0">
-                <a:solidFill>
-                  <a:srgbClr val="067D17"/>
-                </a:solidFill>
-                <a:latin typeface="JetBrains Mono"/>
-                <a:ea typeface="JetBrains Mono"/>
-                <a:cs typeface="JetBrains Mono"/>
-              </a:rPr>
-              <a:t>"scissors"</a:t>
-            </a:r>
-            <a:r>
-              <a:rPr sz="2400" b="0">
-                <a:solidFill>
-                  <a:srgbClr val="080808"/>
-                </a:solidFill>
-                <a:latin typeface="Calibri"/>
-                <a:ea typeface="Calibri"/>
-                <a:cs typeface="Calibri"/>
-              </a:rPr>
-              <a:t> in that order.</a:t>
+              <a:t> must display pencil, book and scissors in that order.</a:t>
             </a:r>
           </a:p>
         </p:txBody>
@@ -8348,51 +8260,7 @@
                 <a:ea typeface="Calibri"/>
                 <a:cs typeface="Calibri"/>
               </a:rPr>
-              <a:t>After the replacement, ask for a second valid position and display the item currently stored there. For 1/</a:t>
-            </a:r>
-            <a:r>
-              <a:rPr sz="2400" b="0">
-                <a:solidFill>
-                  <a:srgbClr val="067D17"/>
-                </a:solidFill>
-                <a:latin typeface="JetBrains Mono"/>
-                <a:ea typeface="JetBrains Mono"/>
-                <a:cs typeface="JetBrains Mono"/>
-              </a:rPr>
-              <a:t>"folder"</a:t>
-            </a:r>
-            <a:r>
-              <a:rPr sz="2400" b="0">
-                <a:solidFill>
-                  <a:srgbClr val="080808"/>
-                </a:solidFill>
-                <a:latin typeface="Calibri"/>
-                <a:ea typeface="Calibri"/>
-                <a:cs typeface="Calibri"/>
-              </a:rPr>
-              <a:t> then 1, the selected item must be </a:t>
-            </a:r>
-            <a:r>
-              <a:rPr sz="2400" b="0">
-                <a:solidFill>
-                  <a:srgbClr val="067D17"/>
-                </a:solidFill>
-                <a:latin typeface="JetBrains Mono"/>
-                <a:ea typeface="JetBrains Mono"/>
-                <a:cs typeface="JetBrains Mono"/>
-              </a:rPr>
-              <a:t>"folder"</a:t>
-            </a:r>
-            <a:r>
-              <a:rPr sz="2400" b="0">
-                <a:solidFill>
-                  <a:srgbClr val="080808"/>
-                </a:solidFill>
-                <a:latin typeface="Calibri"/>
-                <a:ea typeface="Calibri"/>
-                <a:cs typeface="Calibri"/>
-              </a:rPr>
-              <a:t>.</a:t>
+              <a:t>After the replacement, ask for a second valid position and display the item currently stored there. For 1/folder then 1, the selected item must be folder.</a:t>
             </a:r>
           </a:p>
         </p:txBody>

--- a/Mapped Curriculum Lessons/Grade 7/Lesson 22 - List Positions and Updates/List Positions and Updates - Slides.pptx
+++ b/Mapped Curriculum Lessons/Grade 7/Lesson 22 - List Positions and Updates/List Positions and Updates - Slides.pptx
@@ -2,28 +2,28 @@
 <file path=ppt/presentation.xml><?xml version="1.0" encoding="utf-8"?>
 <p:presentation xmlns:p="http://schemas.openxmlformats.org/presentationml/2006/main" embedTrueTypeFonts="1" saveSubsetFonts="0">
   <p:sldMasterIdLst>
-    <p:sldMasterId xmlns:r="http://schemas.openxmlformats.org/officeDocument/2006/relationships" id="2147483648" r:id="Ra09874f192a848e0"/>
+    <p:sldMasterId xmlns:r="http://schemas.openxmlformats.org/officeDocument/2006/relationships" id="2147483648" r:id="Re51fd9e6646e457b"/>
   </p:sldMasterIdLst>
   <p:notesMasterIdLst>
-    <p:notesMasterId xmlns:r="http://schemas.openxmlformats.org/officeDocument/2006/relationships" r:id="Re93b4474dce64a3e"/>
+    <p:notesMasterId xmlns:r="http://schemas.openxmlformats.org/officeDocument/2006/relationships" r:id="R25a39c67ed474927"/>
   </p:notesMasterIdLst>
   <p:sldIdLst>
-    <p:sldId xmlns:r="http://schemas.openxmlformats.org/officeDocument/2006/relationships" id="256" r:id="R97ab9f386c654c04"/>
-    <p:sldId xmlns:r="http://schemas.openxmlformats.org/officeDocument/2006/relationships" id="257" r:id="R237c8370fa07425c"/>
-    <p:sldId xmlns:r="http://schemas.openxmlformats.org/officeDocument/2006/relationships" id="258" r:id="Rc24f89c4f69c4331"/>
-    <p:sldId xmlns:r="http://schemas.openxmlformats.org/officeDocument/2006/relationships" id="259" r:id="R4e721b55c8884831"/>
-    <p:sldId xmlns:r="http://schemas.openxmlformats.org/officeDocument/2006/relationships" id="260" r:id="Re4d925be57e44fb4"/>
-    <p:sldId xmlns:r="http://schemas.openxmlformats.org/officeDocument/2006/relationships" id="261" r:id="R320e1d6ed9bc4915"/>
-    <p:sldId xmlns:r="http://schemas.openxmlformats.org/officeDocument/2006/relationships" id="262" r:id="R6cd3f2f7243f428f"/>
-    <p:sldId xmlns:r="http://schemas.openxmlformats.org/officeDocument/2006/relationships" id="263" r:id="Rb14d5f2c04914962"/>
-    <p:sldId xmlns:r="http://schemas.openxmlformats.org/officeDocument/2006/relationships" id="264" r:id="R685d9c0b6b554404"/>
+    <p:sldId xmlns:r="http://schemas.openxmlformats.org/officeDocument/2006/relationships" id="256" r:id="R007c447c1a40460d"/>
+    <p:sldId xmlns:r="http://schemas.openxmlformats.org/officeDocument/2006/relationships" id="257" r:id="Rcbca212ea4f344d7"/>
+    <p:sldId xmlns:r="http://schemas.openxmlformats.org/officeDocument/2006/relationships" id="258" r:id="R805f612443d145cf"/>
+    <p:sldId xmlns:r="http://schemas.openxmlformats.org/officeDocument/2006/relationships" id="259" r:id="Rdd4e536072294853"/>
+    <p:sldId xmlns:r="http://schemas.openxmlformats.org/officeDocument/2006/relationships" id="260" r:id="Re35604540ab34a7b"/>
+    <p:sldId xmlns:r="http://schemas.openxmlformats.org/officeDocument/2006/relationships" id="261" r:id="R6aa691cf03c64a3c"/>
+    <p:sldId xmlns:r="http://schemas.openxmlformats.org/officeDocument/2006/relationships" id="262" r:id="R944d71925a56472c"/>
+    <p:sldId xmlns:r="http://schemas.openxmlformats.org/officeDocument/2006/relationships" id="263" r:id="R4c9257068c9845f2"/>
+    <p:sldId xmlns:r="http://schemas.openxmlformats.org/officeDocument/2006/relationships" id="264" r:id="R670bdcdc961f48a5"/>
   </p:sldIdLst>
   <p:sldSz cx="12192000" cy="6858000"/>
   <p:notesSz cx="6858000" cy="9144000"/>
   <p:embeddedFontLst>
     <p:embeddedFont>
       <p:font typeface="JetBrains Mono"/>
-      <p:regular xmlns:r="http://schemas.openxmlformats.org/officeDocument/2006/relationships" r:id="Ra62594b4d84045e0"/>
+      <p:regular xmlns:r="http://schemas.openxmlformats.org/officeDocument/2006/relationships" r:id="R3a72bc335b9a4a25"/>
     </p:embeddedFont>
   </p:embeddedFontLst>
 </p:presentation>
@@ -1071,7 +1071,7 @@
           <p:nvPr/>
         </p:nvPicPr>
         <p:blipFill rotWithShape="1">
-          <a:blip xmlns:r="http://schemas.openxmlformats.org/officeDocument/2006/relationships" xmlns:a="http://schemas.openxmlformats.org/drawingml/2006/main" r:embed="R436d227cbdda42ed"/>
+          <a:blip xmlns:r="http://schemas.openxmlformats.org/officeDocument/2006/relationships" xmlns:a="http://schemas.openxmlformats.org/drawingml/2006/main" r:embed="R65b6f85c41a14594"/>
           <a:stretch xmlns:a="http://schemas.openxmlformats.org/drawingml/2006/main"/>
         </p:blipFill>
         <p:spPr>
@@ -1451,7 +1451,7 @@
           <p:nvPr/>
         </p:nvPicPr>
         <p:blipFill rotWithShape="1">
-          <a:blip xmlns:r="http://schemas.openxmlformats.org/officeDocument/2006/relationships" xmlns:a="http://schemas.openxmlformats.org/drawingml/2006/main" r:embed="R5c1902736c1646bd">
+          <a:blip xmlns:r="http://schemas.openxmlformats.org/officeDocument/2006/relationships" xmlns:a="http://schemas.openxmlformats.org/drawingml/2006/main" r:embed="R345839bdce1f4247">
             <a:alphaModFix amt="28000"/>
           </a:blip>
           <a:stretch xmlns:a="http://schemas.openxmlformats.org/drawingml/2006/main"/>
@@ -1664,7 +1664,7 @@
           <p:nvPr/>
         </p:nvPicPr>
         <p:blipFill rotWithShape="1">
-          <a:blip xmlns:r="http://schemas.openxmlformats.org/officeDocument/2006/relationships" xmlns:a="http://schemas.openxmlformats.org/drawingml/2006/main" r:embed="R6416d759f4434a05">
+          <a:blip xmlns:r="http://schemas.openxmlformats.org/officeDocument/2006/relationships" xmlns:a="http://schemas.openxmlformats.org/drawingml/2006/main" r:embed="Rd01d64c8356740d0">
             <a:alphaModFix amt="28000"/>
           </a:blip>
           <a:stretch xmlns:a="http://schemas.openxmlformats.org/drawingml/2006/main"/>
@@ -1899,7 +1899,7 @@
           <p:nvPr/>
         </p:nvPicPr>
         <p:blipFill rotWithShape="1">
-          <a:blip xmlns:r="http://schemas.openxmlformats.org/officeDocument/2006/relationships" xmlns:a="http://schemas.openxmlformats.org/drawingml/2006/main" r:embed="R6d3f22953c4946e7">
+          <a:blip xmlns:r="http://schemas.openxmlformats.org/officeDocument/2006/relationships" xmlns:a="http://schemas.openxmlformats.org/drawingml/2006/main" r:embed="R104ee3fe5ae24e12">
             <a:alphaModFix amt="28000"/>
           </a:blip>
           <a:stretch xmlns:a="http://schemas.openxmlformats.org/drawingml/2006/main"/>
@@ -2176,7 +2176,7 @@
           <p:nvPr/>
         </p:nvPicPr>
         <p:blipFill rotWithShape="1">
-          <a:blip xmlns:r="http://schemas.openxmlformats.org/officeDocument/2006/relationships" xmlns:a="http://schemas.openxmlformats.org/drawingml/2006/main" r:embed="Ra0a0e3931a304628">
+          <a:blip xmlns:r="http://schemas.openxmlformats.org/officeDocument/2006/relationships" xmlns:a="http://schemas.openxmlformats.org/drawingml/2006/main" r:embed="Rabf0010e58884995">
             <a:alphaModFix amt="28000"/>
           </a:blip>
           <a:stretch xmlns:a="http://schemas.openxmlformats.org/drawingml/2006/main"/>
@@ -2451,7 +2451,7 @@
           <p:nvPr/>
         </p:nvPicPr>
         <p:blipFill rotWithShape="1">
-          <a:blip xmlns:r="http://schemas.openxmlformats.org/officeDocument/2006/relationships" xmlns:a="http://schemas.openxmlformats.org/drawingml/2006/main" r:embed="Re1635f18ae904cbb">
+          <a:blip xmlns:r="http://schemas.openxmlformats.org/officeDocument/2006/relationships" xmlns:a="http://schemas.openxmlformats.org/drawingml/2006/main" r:embed="R03f068ce2cfc412d">
             <a:alphaModFix amt="28000"/>
           </a:blip>
           <a:stretch xmlns:a="http://schemas.openxmlformats.org/drawingml/2006/main"/>
@@ -2875,7 +2875,7 @@
           <p:nvPr/>
         </p:nvPicPr>
         <p:blipFill rotWithShape="1">
-          <a:blip xmlns:r="http://schemas.openxmlformats.org/officeDocument/2006/relationships" xmlns:a="http://schemas.openxmlformats.org/drawingml/2006/main" r:embed="R6a3fc1a9374c4c3c">
+          <a:blip xmlns:r="http://schemas.openxmlformats.org/officeDocument/2006/relationships" xmlns:a="http://schemas.openxmlformats.org/drawingml/2006/main" r:embed="Ra051a4d2989c41fd">
             <a:alphaModFix amt="28000"/>
           </a:blip>
           <a:stretch xmlns:a="http://schemas.openxmlformats.org/drawingml/2006/main"/>
@@ -3016,7 +3016,7 @@
           <p:nvPr/>
         </p:nvPicPr>
         <p:blipFill rotWithShape="1">
-          <a:blip xmlns:r="http://schemas.openxmlformats.org/officeDocument/2006/relationships" xmlns:a="http://schemas.openxmlformats.org/drawingml/2006/main" r:embed="Rdabe1043cfbc4ee7">
+          <a:blip xmlns:r="http://schemas.openxmlformats.org/officeDocument/2006/relationships" xmlns:a="http://schemas.openxmlformats.org/drawingml/2006/main" r:embed="Rd017fd3069244b47">
             <a:alphaModFix amt="28000"/>
           </a:blip>
           <a:stretch xmlns:a="http://schemas.openxmlformats.org/drawingml/2006/main"/>
@@ -3130,7 +3130,7 @@
           <p:nvPr/>
         </p:nvPicPr>
         <p:blipFill rotWithShape="1">
-          <a:blip xmlns:r="http://schemas.openxmlformats.org/officeDocument/2006/relationships" xmlns:a="http://schemas.openxmlformats.org/drawingml/2006/main" r:embed="R9079f31d4f9941ef">
+          <a:blip xmlns:r="http://schemas.openxmlformats.org/officeDocument/2006/relationships" xmlns:a="http://schemas.openxmlformats.org/drawingml/2006/main" r:embed="Re0c5f4d4667444f8">
             <a:alphaModFix amt="28000"/>
           </a:blip>
           <a:stretch xmlns:a="http://schemas.openxmlformats.org/drawingml/2006/main"/>
@@ -3457,7 +3457,7 @@
           <p:nvPr/>
         </p:nvPicPr>
         <p:blipFill rotWithShape="1">
-          <a:blip xmlns:r="http://schemas.openxmlformats.org/officeDocument/2006/relationships" xmlns:a="http://schemas.openxmlformats.org/drawingml/2006/main" r:embed="R99e2641a7f1f4c69">
+          <a:blip xmlns:r="http://schemas.openxmlformats.org/officeDocument/2006/relationships" xmlns:a="http://schemas.openxmlformats.org/drawingml/2006/main" r:embed="R27d14fbe87d743fb">
             <a:alphaModFix amt="28000"/>
           </a:blip>
           <a:stretch xmlns:a="http://schemas.openxmlformats.org/drawingml/2006/main"/>
@@ -3745,7 +3745,7 @@
           <p:nvPr/>
         </p:nvPicPr>
         <p:blipFill rotWithShape="1">
-          <a:blip xmlns:r="http://schemas.openxmlformats.org/officeDocument/2006/relationships" xmlns:a="http://schemas.openxmlformats.org/drawingml/2006/main" r:embed="R371b27320b9e4e07">
+          <a:blip xmlns:r="http://schemas.openxmlformats.org/officeDocument/2006/relationships" xmlns:a="http://schemas.openxmlformats.org/drawingml/2006/main" r:embed="R9f6b0af534944051">
             <a:alphaModFix amt="28000"/>
           </a:blip>
           <a:stretch xmlns:a="http://schemas.openxmlformats.org/drawingml/2006/main"/>
@@ -3982,17 +3982,17 @@
   </p:cSld>
   <p:clrMap bg1="lt1" tx1="dk1" bg2="lt2" tx2="dk2" accent1="accent1" accent2="accent2" accent3="accent3" accent4="accent4" accent5="accent5" accent6="accent6" hlink="hlink" folHlink="folHlink"/>
   <p:sldLayoutIdLst>
-    <p:sldLayoutId xmlns:r="http://schemas.openxmlformats.org/officeDocument/2006/relationships" id="2147483649" r:id="R523530dc620f4e5d"/>
-    <p:sldLayoutId xmlns:r="http://schemas.openxmlformats.org/officeDocument/2006/relationships" id="2147483650" r:id="R64b429e034fa44f7"/>
-    <p:sldLayoutId xmlns:r="http://schemas.openxmlformats.org/officeDocument/2006/relationships" id="2147483651" r:id="Rb64a1f451cdc45e8"/>
-    <p:sldLayoutId xmlns:r="http://schemas.openxmlformats.org/officeDocument/2006/relationships" id="2147483652" r:id="Rf11c87fbfec846da"/>
-    <p:sldLayoutId xmlns:r="http://schemas.openxmlformats.org/officeDocument/2006/relationships" id="2147483653" r:id="Rd169805deeb44618"/>
-    <p:sldLayoutId xmlns:r="http://schemas.openxmlformats.org/officeDocument/2006/relationships" id="2147483654" r:id="R5d16636d2c594389"/>
-    <p:sldLayoutId xmlns:r="http://schemas.openxmlformats.org/officeDocument/2006/relationships" id="2147483655" r:id="Ra91918dcf62a49ba"/>
-    <p:sldLayoutId xmlns:r="http://schemas.openxmlformats.org/officeDocument/2006/relationships" id="2147483656" r:id="R232b9b4731154751"/>
-    <p:sldLayoutId xmlns:r="http://schemas.openxmlformats.org/officeDocument/2006/relationships" id="2147483657" r:id="Rbf053fa394f04635"/>
-    <p:sldLayoutId xmlns:r="http://schemas.openxmlformats.org/officeDocument/2006/relationships" id="2147483658" r:id="Rc756c6d29929406c"/>
-    <p:sldLayoutId xmlns:r="http://schemas.openxmlformats.org/officeDocument/2006/relationships" id="2147483659" r:id="R23d3ba3bf2ec4464"/>
+    <p:sldLayoutId xmlns:r="http://schemas.openxmlformats.org/officeDocument/2006/relationships" id="2147483649" r:id="R14157d5a399c4c44"/>
+    <p:sldLayoutId xmlns:r="http://schemas.openxmlformats.org/officeDocument/2006/relationships" id="2147483650" r:id="R375e9de6230d4a46"/>
+    <p:sldLayoutId xmlns:r="http://schemas.openxmlformats.org/officeDocument/2006/relationships" id="2147483651" r:id="R755c768912da4a1f"/>
+    <p:sldLayoutId xmlns:r="http://schemas.openxmlformats.org/officeDocument/2006/relationships" id="2147483652" r:id="R85326e34fddf4991"/>
+    <p:sldLayoutId xmlns:r="http://schemas.openxmlformats.org/officeDocument/2006/relationships" id="2147483653" r:id="R6dff3b02a85446cc"/>
+    <p:sldLayoutId xmlns:r="http://schemas.openxmlformats.org/officeDocument/2006/relationships" id="2147483654" r:id="Rfe082f1f27da4118"/>
+    <p:sldLayoutId xmlns:r="http://schemas.openxmlformats.org/officeDocument/2006/relationships" id="2147483655" r:id="Rab660d3cbb0d454f"/>
+    <p:sldLayoutId xmlns:r="http://schemas.openxmlformats.org/officeDocument/2006/relationships" id="2147483656" r:id="R67c32530d08c4a3d"/>
+    <p:sldLayoutId xmlns:r="http://schemas.openxmlformats.org/officeDocument/2006/relationships" id="2147483657" r:id="R1235a91b54b442e8"/>
+    <p:sldLayoutId xmlns:r="http://schemas.openxmlformats.org/officeDocument/2006/relationships" id="2147483658" r:id="Ra328c2203f7d4006"/>
+    <p:sldLayoutId xmlns:r="http://schemas.openxmlformats.org/officeDocument/2006/relationships" id="2147483659" r:id="R7881a1d46c1b4847"/>
   </p:sldLayoutIdLst>
   <p:hf hdr="0" ftr="0" dt="0"/>
   <p:txStyles>
@@ -7486,7 +7486,7 @@
         </p:spPr>
         <p:txBody>
           <a:bodyPr xmlns:a="http://schemas.openxmlformats.org/drawingml/2006/main">
-            <a:normAutofit fontScale="100000"/>
+            <a:normAutofit fontScale="85483"/>
           </a:bodyPr>
           <a:lstStyle xmlns:a="http://schemas.openxmlformats.org/drawingml/2006/main"/>
           <a:p xmlns:a="http://schemas.openxmlformats.org/drawingml/2006/main">
@@ -7505,18 +7505,18 @@
                 <a:ea typeface="Calibri"/>
                 <a:cs typeface="Calibri"/>
               </a:rPr>
-              <a:t>Replace the item at position 2 with scissors. The final </a:t>
+              <a:t>Keep the starter's first position and replacement inputs. After the first update, display </a:t>
             </a:r>
             <a:r>
               <a:rPr sz="2400" b="0">
                 <a:solidFill>
-                  <a:srgbClr val="1750EB"/>
-                </a:solidFill>
-                <a:latin typeface="JetBrains Mono"/>
-                <a:ea typeface="JetBrains Mono"/>
-                <a:cs typeface="JetBrains Mono"/>
-              </a:rPr>
-              <a:t>list</a:t>
+                  <a:srgbClr val="067D17"/>
+                </a:solidFill>
+                <a:latin typeface="JetBrains Mono"/>
+                <a:ea typeface="JetBrains Mono"/>
+                <a:cs typeface="JetBrains Mono"/>
+              </a:rPr>
+              <a:t>"New item:"</a:t>
             </a:r>
             <a:r>
               <a:rPr sz="2400" b="0">
@@ -7527,7 +7527,73 @@
                 <a:ea typeface="Calibri"/>
                 <a:cs typeface="Calibri"/>
               </a:rPr>
-              <a:t> must display pencil, book and scissors in that order.</a:t>
+              <a:t> followed by the item at [position]. Ask for another position from 0 to 2 and store it in [second_position]. Ask for another replacement and store it in [second_replacement], then update that item. Test position 2 with </a:t>
+            </a:r>
+            <a:r>
+              <a:rPr sz="2400" b="0">
+                <a:solidFill>
+                  <a:srgbClr val="067D17"/>
+                </a:solidFill>
+                <a:latin typeface="JetBrains Mono"/>
+                <a:ea typeface="JetBrains Mono"/>
+                <a:cs typeface="JetBrains Mono"/>
+              </a:rPr>
+              <a:t>"scissors"</a:t>
+            </a:r>
+            <a:r>
+              <a:rPr sz="2400" b="0">
+                <a:solidFill>
+                  <a:srgbClr val="080808"/>
+                </a:solidFill>
+                <a:latin typeface="Calibri"/>
+                <a:ea typeface="Calibri"/>
+                <a:cs typeface="Calibri"/>
+              </a:rPr>
+              <a:t>, followed by position 0 with </a:t>
+            </a:r>
+            <a:r>
+              <a:rPr sz="2400" b="0">
+                <a:solidFill>
+                  <a:srgbClr val="067D17"/>
+                </a:solidFill>
+                <a:latin typeface="JetBrains Mono"/>
+                <a:ea typeface="JetBrains Mono"/>
+                <a:cs typeface="JetBrains Mono"/>
+              </a:rPr>
+              <a:t>"pen"</a:t>
+            </a:r>
+            <a:r>
+              <a:rPr sz="2400" b="0">
+                <a:solidFill>
+                  <a:srgbClr val="080808"/>
+                </a:solidFill>
+                <a:latin typeface="Calibri"/>
+                <a:ea typeface="Calibri"/>
+                <a:cs typeface="Calibri"/>
+              </a:rPr>
+              <a:t>; display </a:t>
+            </a:r>
+            <a:r>
+              <a:rPr sz="2400" b="0">
+                <a:solidFill>
+                  <a:srgbClr val="067D17"/>
+                </a:solidFill>
+                <a:latin typeface="JetBrains Mono"/>
+                <a:ea typeface="JetBrains Mono"/>
+                <a:cs typeface="JetBrains Mono"/>
+              </a:rPr>
+              <a:t>"Updated list: ['pen', 'book', 'scissors']"</a:t>
+            </a:r>
+            <a:r>
+              <a:rPr sz="2400" b="0">
+                <a:solidFill>
+                  <a:srgbClr val="080808"/>
+                </a:solidFill>
+                <a:latin typeface="Calibri"/>
+                <a:ea typeface="Calibri"/>
+                <a:cs typeface="Calibri"/>
+              </a:rPr>
+              <a:t>.</a:t>
             </a:r>
           </a:p>
         </p:txBody>
@@ -8260,7 +8326,73 @@
                 <a:ea typeface="Calibri"/>
                 <a:cs typeface="Calibri"/>
               </a:rPr>
-              <a:t>After the replacement, ask for a second valid position and display the item currently stored there. For 1/folder then 1, the selected item must be folder.</a:t>
+              <a:t>After completing one replacement, ask for another position from 0 to 2 and store it in [check_position]. Display </a:t>
+            </a:r>
+            <a:r>
+              <a:rPr sz="2400" b="0">
+                <a:solidFill>
+                  <a:srgbClr val="067D17"/>
+                </a:solidFill>
+                <a:latin typeface="JetBrains Mono"/>
+                <a:ea typeface="JetBrains Mono"/>
+                <a:cs typeface="JetBrains Mono"/>
+              </a:rPr>
+              <a:t>"Selected item:"</a:t>
+            </a:r>
+            <a:r>
+              <a:rPr sz="2400" b="0">
+                <a:solidFill>
+                  <a:srgbClr val="080808"/>
+                </a:solidFill>
+                <a:latin typeface="Calibri"/>
+                <a:ea typeface="Calibri"/>
+                <a:cs typeface="Calibri"/>
+              </a:rPr>
+              <a:t> followed by the item at [check_position]. Test replacement position 1, replacement </a:t>
+            </a:r>
+            <a:r>
+              <a:rPr sz="2400" b="0">
+                <a:solidFill>
+                  <a:srgbClr val="067D17"/>
+                </a:solidFill>
+                <a:latin typeface="JetBrains Mono"/>
+                <a:ea typeface="JetBrains Mono"/>
+                <a:cs typeface="JetBrains Mono"/>
+              </a:rPr>
+              <a:t>"folder"</a:t>
+            </a:r>
+            <a:r>
+              <a:rPr sz="2400" b="0">
+                <a:solidFill>
+                  <a:srgbClr val="080808"/>
+                </a:solidFill>
+                <a:latin typeface="Calibri"/>
+                <a:ea typeface="Calibri"/>
+                <a:cs typeface="Calibri"/>
+              </a:rPr>
+              <a:t> and check position 1; display </a:t>
+            </a:r>
+            <a:r>
+              <a:rPr sz="2400" b="0">
+                <a:solidFill>
+                  <a:srgbClr val="067D17"/>
+                </a:solidFill>
+                <a:latin typeface="JetBrains Mono"/>
+                <a:ea typeface="JetBrains Mono"/>
+                <a:cs typeface="JetBrains Mono"/>
+              </a:rPr>
+              <a:t>"Selected item: folder"</a:t>
+            </a:r>
+            <a:r>
+              <a:rPr sz="2400" b="0">
+                <a:solidFill>
+                  <a:srgbClr val="080808"/>
+                </a:solidFill>
+                <a:latin typeface="Calibri"/>
+                <a:ea typeface="Calibri"/>
+                <a:cs typeface="Calibri"/>
+              </a:rPr>
+              <a:t>.</a:t>
             </a:r>
           </a:p>
         </p:txBody>
@@ -8974,7 +9106,7 @@
         </p:spPr>
         <p:txBody>
           <a:bodyPr xmlns:a="http://schemas.openxmlformats.org/drawingml/2006/main">
-            <a:normAutofit fontScale="100000"/>
+            <a:normAutofit fontScale="87835"/>
           </a:bodyPr>
           <a:lstStyle xmlns:a="http://schemas.openxmlformats.org/drawingml/2006/main"/>
           <a:p xmlns:a="http://schemas.openxmlformats.org/drawingml/2006/main">
@@ -8993,7 +9125,161 @@
                 <a:ea typeface="Calibri"/>
                 <a:cs typeface="Calibri"/>
               </a:rPr>
-              <a:t>Build a three-stop route editor. Start with three place names, ask which valid position to change and the new place, then display the first stop and the complete updated route.</a:t>
+              <a:t>Store </a:t>
+            </a:r>
+            <a:r>
+              <a:rPr sz="2400" b="0">
+                <a:solidFill>
+                  <a:srgbClr val="067D17"/>
+                </a:solidFill>
+                <a:latin typeface="JetBrains Mono"/>
+                <a:ea typeface="JetBrains Mono"/>
+                <a:cs typeface="JetBrains Mono"/>
+              </a:rPr>
+              <a:t>"Park"</a:t>
+            </a:r>
+            <a:r>
+              <a:rPr sz="2400" b="0">
+                <a:solidFill>
+                  <a:srgbClr val="080808"/>
+                </a:solidFill>
+                <a:latin typeface="Calibri"/>
+                <a:ea typeface="Calibri"/>
+                <a:cs typeface="Calibri"/>
+              </a:rPr>
+              <a:t>, </a:t>
+            </a:r>
+            <a:r>
+              <a:rPr sz="2400" b="0">
+                <a:solidFill>
+                  <a:srgbClr val="067D17"/>
+                </a:solidFill>
+                <a:latin typeface="JetBrains Mono"/>
+                <a:ea typeface="JetBrains Mono"/>
+                <a:cs typeface="JetBrains Mono"/>
+              </a:rPr>
+              <a:t>"Museum"</a:t>
+            </a:r>
+            <a:r>
+              <a:rPr sz="2400" b="0">
+                <a:solidFill>
+                  <a:srgbClr val="080808"/>
+                </a:solidFill>
+                <a:latin typeface="Calibri"/>
+                <a:ea typeface="Calibri"/>
+                <a:cs typeface="Calibri"/>
+              </a:rPr>
+              <a:t> and </a:t>
+            </a:r>
+            <a:r>
+              <a:rPr sz="2400" b="0">
+                <a:solidFill>
+                  <a:srgbClr val="067D17"/>
+                </a:solidFill>
+                <a:latin typeface="JetBrains Mono"/>
+                <a:ea typeface="JetBrains Mono"/>
+                <a:cs typeface="JetBrains Mono"/>
+              </a:rPr>
+              <a:t>"Station"</a:t>
+            </a:r>
+            <a:r>
+              <a:rPr sz="2400" b="0">
+                <a:solidFill>
+                  <a:srgbClr val="080808"/>
+                </a:solidFill>
+                <a:latin typeface="Calibri"/>
+                <a:ea typeface="Calibri"/>
+                <a:cs typeface="Calibri"/>
+              </a:rPr>
+              <a:t> in a </a:t>
+            </a:r>
+            <a:r>
+              <a:rPr sz="2400" b="0">
+                <a:solidFill>
+                  <a:srgbClr val="1750EB"/>
+                </a:solidFill>
+                <a:latin typeface="JetBrains Mono"/>
+                <a:ea typeface="JetBrains Mono"/>
+                <a:cs typeface="JetBrains Mono"/>
+              </a:rPr>
+              <a:t>list</a:t>
+            </a:r>
+            <a:r>
+              <a:rPr sz="2400" b="0">
+                <a:solidFill>
+                  <a:srgbClr val="080808"/>
+                </a:solidFill>
+                <a:latin typeface="Calibri"/>
+                <a:ea typeface="Calibri"/>
+                <a:cs typeface="Calibri"/>
+              </a:rPr>
+              <a:t> called [places]. Ask for a position from 0 to 2 and store it in [position]. Ask for a new place and store it in [new_place], then replace the item at [position]. Test position 1 and </a:t>
+            </a:r>
+            <a:r>
+              <a:rPr sz="2400" b="0">
+                <a:solidFill>
+                  <a:srgbClr val="067D17"/>
+                </a:solidFill>
+                <a:latin typeface="JetBrains Mono"/>
+                <a:ea typeface="JetBrains Mono"/>
+                <a:cs typeface="JetBrains Mono"/>
+              </a:rPr>
+              <a:t>"Library"</a:t>
+            </a:r>
+            <a:r>
+              <a:rPr sz="2400" b="0">
+                <a:solidFill>
+                  <a:srgbClr val="080808"/>
+                </a:solidFill>
+                <a:latin typeface="Calibri"/>
+                <a:ea typeface="Calibri"/>
+                <a:cs typeface="Calibri"/>
+              </a:rPr>
+              <a:t>; display </a:t>
+            </a:r>
+            <a:r>
+              <a:rPr sz="2400" b="0">
+                <a:solidFill>
+                  <a:srgbClr val="067D17"/>
+                </a:solidFill>
+                <a:latin typeface="JetBrains Mono"/>
+                <a:ea typeface="JetBrains Mono"/>
+                <a:cs typeface="JetBrains Mono"/>
+              </a:rPr>
+              <a:t>"First stop: Park"</a:t>
+            </a:r>
+            <a:r>
+              <a:rPr sz="2400" b="0">
+                <a:solidFill>
+                  <a:srgbClr val="080808"/>
+                </a:solidFill>
+                <a:latin typeface="Calibri"/>
+                <a:ea typeface="Calibri"/>
+                <a:cs typeface="Calibri"/>
+              </a:rPr>
+              <a:t> and </a:t>
+            </a:r>
+            <a:r>
+              <a:rPr sz="2400" b="0">
+                <a:solidFill>
+                  <a:srgbClr val="067D17"/>
+                </a:solidFill>
+                <a:latin typeface="JetBrains Mono"/>
+                <a:ea typeface="JetBrains Mono"/>
+                <a:cs typeface="JetBrains Mono"/>
+              </a:rPr>
+              <a:t>"Updated places: ['Park', 'Library', 'Station']"</a:t>
+            </a:r>
+            <a:r>
+              <a:rPr sz="2400" b="0">
+                <a:solidFill>
+                  <a:srgbClr val="080808"/>
+                </a:solidFill>
+                <a:latin typeface="Calibri"/>
+                <a:ea typeface="Calibri"/>
+                <a:cs typeface="Calibri"/>
+              </a:rPr>
+              <a:t>.</a:t>
             </a:r>
           </a:p>
         </p:txBody>

--- a/Mapped Curriculum Lessons/Grade 7/Lesson 22 - List Positions and Updates/List Positions and Updates - Slides.pptx
+++ b/Mapped Curriculum Lessons/Grade 7/Lesson 22 - List Positions and Updates/List Positions and Updates - Slides.pptx
@@ -2,28 +2,28 @@
 <file path=ppt/presentation.xml><?xml version="1.0" encoding="utf-8"?>
 <p:presentation xmlns:p="http://schemas.openxmlformats.org/presentationml/2006/main" embedTrueTypeFonts="1" saveSubsetFonts="0">
   <p:sldMasterIdLst>
-    <p:sldMasterId xmlns:r="http://schemas.openxmlformats.org/officeDocument/2006/relationships" id="2147483648" r:id="Re51fd9e6646e457b"/>
+    <p:sldMasterId xmlns:r="http://schemas.openxmlformats.org/officeDocument/2006/relationships" id="2147483648" r:id="R14f4e6c7c5c14406"/>
   </p:sldMasterIdLst>
   <p:notesMasterIdLst>
-    <p:notesMasterId xmlns:r="http://schemas.openxmlformats.org/officeDocument/2006/relationships" r:id="R25a39c67ed474927"/>
+    <p:notesMasterId xmlns:r="http://schemas.openxmlformats.org/officeDocument/2006/relationships" r:id="R41df40386e754bbf"/>
   </p:notesMasterIdLst>
   <p:sldIdLst>
-    <p:sldId xmlns:r="http://schemas.openxmlformats.org/officeDocument/2006/relationships" id="256" r:id="R007c447c1a40460d"/>
-    <p:sldId xmlns:r="http://schemas.openxmlformats.org/officeDocument/2006/relationships" id="257" r:id="Rcbca212ea4f344d7"/>
-    <p:sldId xmlns:r="http://schemas.openxmlformats.org/officeDocument/2006/relationships" id="258" r:id="R805f612443d145cf"/>
-    <p:sldId xmlns:r="http://schemas.openxmlformats.org/officeDocument/2006/relationships" id="259" r:id="Rdd4e536072294853"/>
-    <p:sldId xmlns:r="http://schemas.openxmlformats.org/officeDocument/2006/relationships" id="260" r:id="Re35604540ab34a7b"/>
-    <p:sldId xmlns:r="http://schemas.openxmlformats.org/officeDocument/2006/relationships" id="261" r:id="R6aa691cf03c64a3c"/>
-    <p:sldId xmlns:r="http://schemas.openxmlformats.org/officeDocument/2006/relationships" id="262" r:id="R944d71925a56472c"/>
-    <p:sldId xmlns:r="http://schemas.openxmlformats.org/officeDocument/2006/relationships" id="263" r:id="R4c9257068c9845f2"/>
-    <p:sldId xmlns:r="http://schemas.openxmlformats.org/officeDocument/2006/relationships" id="264" r:id="R670bdcdc961f48a5"/>
+    <p:sldId xmlns:r="http://schemas.openxmlformats.org/officeDocument/2006/relationships" id="256" r:id="R1cd75144a33b4226"/>
+    <p:sldId xmlns:r="http://schemas.openxmlformats.org/officeDocument/2006/relationships" id="257" r:id="R23f5c9c9c62b4062"/>
+    <p:sldId xmlns:r="http://schemas.openxmlformats.org/officeDocument/2006/relationships" id="258" r:id="R0603302cb24b40f0"/>
+    <p:sldId xmlns:r="http://schemas.openxmlformats.org/officeDocument/2006/relationships" id="259" r:id="Rc158c9fe53e44e7f"/>
+    <p:sldId xmlns:r="http://schemas.openxmlformats.org/officeDocument/2006/relationships" id="260" r:id="R7daf0d6361b14185"/>
+    <p:sldId xmlns:r="http://schemas.openxmlformats.org/officeDocument/2006/relationships" id="261" r:id="R1ae47d4fa3154479"/>
+    <p:sldId xmlns:r="http://schemas.openxmlformats.org/officeDocument/2006/relationships" id="262" r:id="Rd52fa4fe2c1a44a4"/>
+    <p:sldId xmlns:r="http://schemas.openxmlformats.org/officeDocument/2006/relationships" id="263" r:id="Re8178cb01a1b4fd8"/>
+    <p:sldId xmlns:r="http://schemas.openxmlformats.org/officeDocument/2006/relationships" id="264" r:id="R81abd20d6dae4edb"/>
   </p:sldIdLst>
   <p:sldSz cx="12192000" cy="6858000"/>
   <p:notesSz cx="6858000" cy="9144000"/>
   <p:embeddedFontLst>
     <p:embeddedFont>
       <p:font typeface="JetBrains Mono"/>
-      <p:regular xmlns:r="http://schemas.openxmlformats.org/officeDocument/2006/relationships" r:id="R3a72bc335b9a4a25"/>
+      <p:regular xmlns:r="http://schemas.openxmlformats.org/officeDocument/2006/relationships" r:id="Rd9baece58e92486c"/>
     </p:embeddedFont>
   </p:embeddedFontLst>
 </p:presentation>
@@ -1071,7 +1071,7 @@
           <p:nvPr/>
         </p:nvPicPr>
         <p:blipFill rotWithShape="1">
-          <a:blip xmlns:r="http://schemas.openxmlformats.org/officeDocument/2006/relationships" xmlns:a="http://schemas.openxmlformats.org/drawingml/2006/main" r:embed="R65b6f85c41a14594"/>
+          <a:blip xmlns:r="http://schemas.openxmlformats.org/officeDocument/2006/relationships" xmlns:a="http://schemas.openxmlformats.org/drawingml/2006/main" r:embed="R72347039257e41c9"/>
           <a:stretch xmlns:a="http://schemas.openxmlformats.org/drawingml/2006/main"/>
         </p:blipFill>
         <p:spPr>
@@ -1451,7 +1451,7 @@
           <p:nvPr/>
         </p:nvPicPr>
         <p:blipFill rotWithShape="1">
-          <a:blip xmlns:r="http://schemas.openxmlformats.org/officeDocument/2006/relationships" xmlns:a="http://schemas.openxmlformats.org/drawingml/2006/main" r:embed="R345839bdce1f4247">
+          <a:blip xmlns:r="http://schemas.openxmlformats.org/officeDocument/2006/relationships" xmlns:a="http://schemas.openxmlformats.org/drawingml/2006/main" r:embed="R85b43e171b0245d4">
             <a:alphaModFix amt="28000"/>
           </a:blip>
           <a:stretch xmlns:a="http://schemas.openxmlformats.org/drawingml/2006/main"/>
@@ -1664,7 +1664,7 @@
           <p:nvPr/>
         </p:nvPicPr>
         <p:blipFill rotWithShape="1">
-          <a:blip xmlns:r="http://schemas.openxmlformats.org/officeDocument/2006/relationships" xmlns:a="http://schemas.openxmlformats.org/drawingml/2006/main" r:embed="Rd01d64c8356740d0">
+          <a:blip xmlns:r="http://schemas.openxmlformats.org/officeDocument/2006/relationships" xmlns:a="http://schemas.openxmlformats.org/drawingml/2006/main" r:embed="Ra1bdd216f787469d">
             <a:alphaModFix amt="28000"/>
           </a:blip>
           <a:stretch xmlns:a="http://schemas.openxmlformats.org/drawingml/2006/main"/>
@@ -1899,7 +1899,7 @@
           <p:nvPr/>
         </p:nvPicPr>
         <p:blipFill rotWithShape="1">
-          <a:blip xmlns:r="http://schemas.openxmlformats.org/officeDocument/2006/relationships" xmlns:a="http://schemas.openxmlformats.org/drawingml/2006/main" r:embed="R104ee3fe5ae24e12">
+          <a:blip xmlns:r="http://schemas.openxmlformats.org/officeDocument/2006/relationships" xmlns:a="http://schemas.openxmlformats.org/drawingml/2006/main" r:embed="R6fbfee92581c4022">
             <a:alphaModFix amt="28000"/>
           </a:blip>
           <a:stretch xmlns:a="http://schemas.openxmlformats.org/drawingml/2006/main"/>
@@ -2176,7 +2176,7 @@
           <p:nvPr/>
         </p:nvPicPr>
         <p:blipFill rotWithShape="1">
-          <a:blip xmlns:r="http://schemas.openxmlformats.org/officeDocument/2006/relationships" xmlns:a="http://schemas.openxmlformats.org/drawingml/2006/main" r:embed="Rabf0010e58884995">
+          <a:blip xmlns:r="http://schemas.openxmlformats.org/officeDocument/2006/relationships" xmlns:a="http://schemas.openxmlformats.org/drawingml/2006/main" r:embed="R5f011038a60a429b">
             <a:alphaModFix amt="28000"/>
           </a:blip>
           <a:stretch xmlns:a="http://schemas.openxmlformats.org/drawingml/2006/main"/>
@@ -2451,7 +2451,7 @@
           <p:nvPr/>
         </p:nvPicPr>
         <p:blipFill rotWithShape="1">
-          <a:blip xmlns:r="http://schemas.openxmlformats.org/officeDocument/2006/relationships" xmlns:a="http://schemas.openxmlformats.org/drawingml/2006/main" r:embed="R03f068ce2cfc412d">
+          <a:blip xmlns:r="http://schemas.openxmlformats.org/officeDocument/2006/relationships" xmlns:a="http://schemas.openxmlformats.org/drawingml/2006/main" r:embed="Rafa8e77224a84678">
             <a:alphaModFix amt="28000"/>
           </a:blip>
           <a:stretch xmlns:a="http://schemas.openxmlformats.org/drawingml/2006/main"/>
@@ -2875,7 +2875,7 @@
           <p:nvPr/>
         </p:nvPicPr>
         <p:blipFill rotWithShape="1">
-          <a:blip xmlns:r="http://schemas.openxmlformats.org/officeDocument/2006/relationships" xmlns:a="http://schemas.openxmlformats.org/drawingml/2006/main" r:embed="Ra051a4d2989c41fd">
+          <a:blip xmlns:r="http://schemas.openxmlformats.org/officeDocument/2006/relationships" xmlns:a="http://schemas.openxmlformats.org/drawingml/2006/main" r:embed="R199b42aa227542b3">
             <a:alphaModFix amt="28000"/>
           </a:blip>
           <a:stretch xmlns:a="http://schemas.openxmlformats.org/drawingml/2006/main"/>
@@ -3016,7 +3016,7 @@
           <p:nvPr/>
         </p:nvPicPr>
         <p:blipFill rotWithShape="1">
-          <a:blip xmlns:r="http://schemas.openxmlformats.org/officeDocument/2006/relationships" xmlns:a="http://schemas.openxmlformats.org/drawingml/2006/main" r:embed="Rd017fd3069244b47">
+          <a:blip xmlns:r="http://schemas.openxmlformats.org/officeDocument/2006/relationships" xmlns:a="http://schemas.openxmlformats.org/drawingml/2006/main" r:embed="R8eb95f6f93474df5">
             <a:alphaModFix amt="28000"/>
           </a:blip>
           <a:stretch xmlns:a="http://schemas.openxmlformats.org/drawingml/2006/main"/>
@@ -3130,7 +3130,7 @@
           <p:nvPr/>
         </p:nvPicPr>
         <p:blipFill rotWithShape="1">
-          <a:blip xmlns:r="http://schemas.openxmlformats.org/officeDocument/2006/relationships" xmlns:a="http://schemas.openxmlformats.org/drawingml/2006/main" r:embed="Re0c5f4d4667444f8">
+          <a:blip xmlns:r="http://schemas.openxmlformats.org/officeDocument/2006/relationships" xmlns:a="http://schemas.openxmlformats.org/drawingml/2006/main" r:embed="Rf3b334b1f3bc42cf">
             <a:alphaModFix amt="28000"/>
           </a:blip>
           <a:stretch xmlns:a="http://schemas.openxmlformats.org/drawingml/2006/main"/>
@@ -3457,7 +3457,7 @@
           <p:nvPr/>
         </p:nvPicPr>
         <p:blipFill rotWithShape="1">
-          <a:blip xmlns:r="http://schemas.openxmlformats.org/officeDocument/2006/relationships" xmlns:a="http://schemas.openxmlformats.org/drawingml/2006/main" r:embed="R27d14fbe87d743fb">
+          <a:blip xmlns:r="http://schemas.openxmlformats.org/officeDocument/2006/relationships" xmlns:a="http://schemas.openxmlformats.org/drawingml/2006/main" r:embed="R1879daebd1814d47">
             <a:alphaModFix amt="28000"/>
           </a:blip>
           <a:stretch xmlns:a="http://schemas.openxmlformats.org/drawingml/2006/main"/>
@@ -3745,7 +3745,7 @@
           <p:nvPr/>
         </p:nvPicPr>
         <p:blipFill rotWithShape="1">
-          <a:blip xmlns:r="http://schemas.openxmlformats.org/officeDocument/2006/relationships" xmlns:a="http://schemas.openxmlformats.org/drawingml/2006/main" r:embed="R9f6b0af534944051">
+          <a:blip xmlns:r="http://schemas.openxmlformats.org/officeDocument/2006/relationships" xmlns:a="http://schemas.openxmlformats.org/drawingml/2006/main" r:embed="R1368583d999c4637">
             <a:alphaModFix amt="28000"/>
           </a:blip>
           <a:stretch xmlns:a="http://schemas.openxmlformats.org/drawingml/2006/main"/>
@@ -3982,17 +3982,17 @@
   </p:cSld>
   <p:clrMap bg1="lt1" tx1="dk1" bg2="lt2" tx2="dk2" accent1="accent1" accent2="accent2" accent3="accent3" accent4="accent4" accent5="accent5" accent6="accent6" hlink="hlink" folHlink="folHlink"/>
   <p:sldLayoutIdLst>
-    <p:sldLayoutId xmlns:r="http://schemas.openxmlformats.org/officeDocument/2006/relationships" id="2147483649" r:id="R14157d5a399c4c44"/>
-    <p:sldLayoutId xmlns:r="http://schemas.openxmlformats.org/officeDocument/2006/relationships" id="2147483650" r:id="R375e9de6230d4a46"/>
-    <p:sldLayoutId xmlns:r="http://schemas.openxmlformats.org/officeDocument/2006/relationships" id="2147483651" r:id="R755c768912da4a1f"/>
-    <p:sldLayoutId xmlns:r="http://schemas.openxmlformats.org/officeDocument/2006/relationships" id="2147483652" r:id="R85326e34fddf4991"/>
-    <p:sldLayoutId xmlns:r="http://schemas.openxmlformats.org/officeDocument/2006/relationships" id="2147483653" r:id="R6dff3b02a85446cc"/>
-    <p:sldLayoutId xmlns:r="http://schemas.openxmlformats.org/officeDocument/2006/relationships" id="2147483654" r:id="Rfe082f1f27da4118"/>
-    <p:sldLayoutId xmlns:r="http://schemas.openxmlformats.org/officeDocument/2006/relationships" id="2147483655" r:id="Rab660d3cbb0d454f"/>
-    <p:sldLayoutId xmlns:r="http://schemas.openxmlformats.org/officeDocument/2006/relationships" id="2147483656" r:id="R67c32530d08c4a3d"/>
-    <p:sldLayoutId xmlns:r="http://schemas.openxmlformats.org/officeDocument/2006/relationships" id="2147483657" r:id="R1235a91b54b442e8"/>
-    <p:sldLayoutId xmlns:r="http://schemas.openxmlformats.org/officeDocument/2006/relationships" id="2147483658" r:id="Ra328c2203f7d4006"/>
-    <p:sldLayoutId xmlns:r="http://schemas.openxmlformats.org/officeDocument/2006/relationships" id="2147483659" r:id="R7881a1d46c1b4847"/>
+    <p:sldLayoutId xmlns:r="http://schemas.openxmlformats.org/officeDocument/2006/relationships" id="2147483649" r:id="Rb6c2578ee87947d6"/>
+    <p:sldLayoutId xmlns:r="http://schemas.openxmlformats.org/officeDocument/2006/relationships" id="2147483650" r:id="R6d46856e58f14cf8"/>
+    <p:sldLayoutId xmlns:r="http://schemas.openxmlformats.org/officeDocument/2006/relationships" id="2147483651" r:id="Rb6ac4e85e05b4b45"/>
+    <p:sldLayoutId xmlns:r="http://schemas.openxmlformats.org/officeDocument/2006/relationships" id="2147483652" r:id="Rd06b2548dce6491e"/>
+    <p:sldLayoutId xmlns:r="http://schemas.openxmlformats.org/officeDocument/2006/relationships" id="2147483653" r:id="Raebd1171a7844c0c"/>
+    <p:sldLayoutId xmlns:r="http://schemas.openxmlformats.org/officeDocument/2006/relationships" id="2147483654" r:id="R303c45e560a84155"/>
+    <p:sldLayoutId xmlns:r="http://schemas.openxmlformats.org/officeDocument/2006/relationships" id="2147483655" r:id="R4f18e1043445493d"/>
+    <p:sldLayoutId xmlns:r="http://schemas.openxmlformats.org/officeDocument/2006/relationships" id="2147483656" r:id="R457e6110b81e4693"/>
+    <p:sldLayoutId xmlns:r="http://schemas.openxmlformats.org/officeDocument/2006/relationships" id="2147483657" r:id="R01ce513ed17b4388"/>
+    <p:sldLayoutId xmlns:r="http://schemas.openxmlformats.org/officeDocument/2006/relationships" id="2147483658" r:id="R8aaf379003484908"/>
+    <p:sldLayoutId xmlns:r="http://schemas.openxmlformats.org/officeDocument/2006/relationships" id="2147483659" r:id="Rcfc2c5e653c74783"/>
   </p:sldLayoutIdLst>
   <p:hf hdr="0" ftr="0" dt="0"/>
   <p:txStyles>
@@ -7486,7 +7486,7 @@
         </p:spPr>
         <p:txBody>
           <a:bodyPr xmlns:a="http://schemas.openxmlformats.org/drawingml/2006/main">
-            <a:normAutofit fontScale="85483"/>
+            <a:normAutofit fontScale="100000"/>
           </a:bodyPr>
           <a:lstStyle xmlns:a="http://schemas.openxmlformats.org/drawingml/2006/main"/>
           <a:p xmlns:a="http://schemas.openxmlformats.org/drawingml/2006/main">
@@ -7505,18 +7505,21 @@
                 <a:ea typeface="Calibri"/>
                 <a:cs typeface="Calibri"/>
               </a:rPr>
-              <a:t>Keep the starter's first position and replacement inputs. After the first update, display </a:t>
-            </a:r>
-            <a:r>
-              <a:rPr sz="2400" b="0">
-                <a:solidFill>
-                  <a:srgbClr val="067D17"/>
-                </a:solidFill>
-                <a:latin typeface="JetBrains Mono"/>
-                <a:ea typeface="JetBrains Mono"/>
-                <a:cs typeface="JetBrains Mono"/>
-              </a:rPr>
-              <a:t>"New item:"</a:t>
+              <a:t>Change the example so it swaps two items instead of replacing one. Ask for two positions from 0 to 2, store the first item in </a:t>
+            </a:r>
+            <a:r>
+              <a:rPr sz="2050" b="0">
+                <a:solidFill>
+                  <a:srgbClr val="6A1B9A"/>
+                </a:solidFill>
+                <a:highlight>
+                  <a:srgbClr val="ECEAF4"/>
+                </a:highlight>
+                <a:latin typeface="JetBrains Mono"/>
+                <a:ea typeface="JetBrains Mono"/>
+                <a:cs typeface="JetBrains Mono"/>
+              </a:rPr>
+              <a:t> temp </a:t>
             </a:r>
             <a:r>
               <a:rPr sz="2400" b="0">
@@ -7527,18 +7530,18 @@
                 <a:ea typeface="Calibri"/>
                 <a:cs typeface="Calibri"/>
               </a:rPr>
-              <a:t> followed by the item at [position]. Ask for another position from 0 to 2 and store it in [second_position]. Ask for another replacement and store it in [second_replacement], then update that item. Test position 2 with </a:t>
-            </a:r>
-            <a:r>
-              <a:rPr sz="2400" b="0">
-                <a:solidFill>
-                  <a:srgbClr val="067D17"/>
-                </a:solidFill>
-                <a:latin typeface="JetBrains Mono"/>
-                <a:ea typeface="JetBrains Mono"/>
-                <a:cs typeface="JetBrains Mono"/>
-              </a:rPr>
-              <a:t>"scissors"</a:t>
+              <a:t>, and use it to swap the items. Display the </a:t>
+            </a:r>
+            <a:r>
+              <a:rPr sz="2050" b="0">
+                <a:solidFill>
+                  <a:srgbClr val="1750EB"/>
+                </a:solidFill>
+                <a:latin typeface="JetBrains Mono"/>
+                <a:ea typeface="JetBrains Mono"/>
+                <a:cs typeface="JetBrains Mono"/>
+              </a:rPr>
+              <a:t>list</a:t>
             </a:r>
             <a:r>
               <a:rPr sz="2400" b="0">
@@ -7549,10 +7552,10 @@
                 <a:ea typeface="Calibri"/>
                 <a:cs typeface="Calibri"/>
               </a:rPr>
-              <a:t>, followed by position 0 with </a:t>
-            </a:r>
-            <a:r>
-              <a:rPr sz="2400" b="0">
+              <a:t> after </a:t>
+            </a:r>
+            <a:r>
+              <a:rPr sz="2050" b="0">
                 <a:solidFill>
                   <a:srgbClr val="067D17"/>
                 </a:solidFill>
@@ -7560,7 +7563,7 @@
                 <a:ea typeface="JetBrains Mono"/>
                 <a:cs typeface="JetBrains Mono"/>
               </a:rPr>
-              <a:t>"pen"</a:t>
+              <a:t>"Updated list:"</a:t>
             </a:r>
             <a:r>
               <a:rPr sz="2400" b="0">
@@ -7571,10 +7574,10 @@
                 <a:ea typeface="Calibri"/>
                 <a:cs typeface="Calibri"/>
               </a:rPr>
-              <a:t>; display </a:t>
-            </a:r>
-            <a:r>
-              <a:rPr sz="2400" b="0">
+              <a:t>. For example, 0 and 2 display </a:t>
+            </a:r>
+            <a:r>
+              <a:rPr sz="2050" b="0">
                 <a:solidFill>
                   <a:srgbClr val="067D17"/>
                 </a:solidFill>
@@ -7582,7 +7585,7 @@
                 <a:ea typeface="JetBrains Mono"/>
                 <a:cs typeface="JetBrains Mono"/>
               </a:rPr>
-              <a:t>"Updated list: ['pen', 'book', 'scissors']"</a:t>
+              <a:t>"Updated list: ['tape', 'book', 'pencil']"</a:t>
             </a:r>
             <a:r>
               <a:rPr sz="2400" b="0">
@@ -8326,18 +8329,21 @@
                 <a:ea typeface="Calibri"/>
                 <a:cs typeface="Calibri"/>
               </a:rPr>
-              <a:t>After completing one replacement, ask for another position from 0 to 2 and store it in [check_position]. Display </a:t>
-            </a:r>
-            <a:r>
-              <a:rPr sz="2400" b="0">
-                <a:solidFill>
-                  <a:srgbClr val="067D17"/>
-                </a:solidFill>
-                <a:latin typeface="JetBrains Mono"/>
-                <a:ea typeface="JetBrains Mono"/>
-                <a:cs typeface="JetBrains Mono"/>
-              </a:rPr>
-              <a:t>"Selected item:"</a:t>
+              <a:t>Extend the example so that, after the replacement, it asks for another position in </a:t>
+            </a:r>
+            <a:r>
+              <a:rPr sz="2050" b="0">
+                <a:solidFill>
+                  <a:srgbClr val="6A1B9A"/>
+                </a:solidFill>
+                <a:highlight>
+                  <a:srgbClr val="ECEAF4"/>
+                </a:highlight>
+                <a:latin typeface="JetBrains Mono"/>
+                <a:ea typeface="JetBrains Mono"/>
+                <a:cs typeface="JetBrains Mono"/>
+              </a:rPr>
+              <a:t> check_position </a:t>
             </a:r>
             <a:r>
               <a:rPr sz="2400" b="0">
@@ -8348,10 +8354,10 @@
                 <a:ea typeface="Calibri"/>
                 <a:cs typeface="Calibri"/>
               </a:rPr>
-              <a:t> followed by the item at [check_position]. Test replacement position 1, replacement </a:t>
-            </a:r>
-            <a:r>
-              <a:rPr sz="2400" b="0">
+              <a:t>. Display the item there after </a:t>
+            </a:r>
+            <a:r>
+              <a:rPr sz="2050" b="0">
                 <a:solidFill>
                   <a:srgbClr val="067D17"/>
                 </a:solidFill>
@@ -8359,7 +8365,7 @@
                 <a:ea typeface="JetBrains Mono"/>
                 <a:cs typeface="JetBrains Mono"/>
               </a:rPr>
-              <a:t>"folder"</a:t>
+              <a:t>"Selected item:"</a:t>
             </a:r>
             <a:r>
               <a:rPr sz="2400" b="0">
@@ -8370,10 +8376,54 @@
                 <a:ea typeface="Calibri"/>
                 <a:cs typeface="Calibri"/>
               </a:rPr>
-              <a:t> and check position 1; display </a:t>
+              <a:t>, then the updated </a:t>
+            </a:r>
+            <a:r>
+              <a:rPr sz="2050" b="0">
+                <a:solidFill>
+                  <a:srgbClr val="1750EB"/>
+                </a:solidFill>
+                <a:latin typeface="JetBrains Mono"/>
+                <a:ea typeface="JetBrains Mono"/>
+                <a:cs typeface="JetBrains Mono"/>
+              </a:rPr>
+              <a:t>list</a:t>
             </a:r>
             <a:r>
               <a:rPr sz="2400" b="0">
+                <a:solidFill>
+                  <a:srgbClr val="080808"/>
+                </a:solidFill>
+                <a:latin typeface="Calibri"/>
+                <a:ea typeface="Calibri"/>
+                <a:cs typeface="Calibri"/>
+              </a:rPr>
+              <a:t>. For example, 1, </a:t>
+            </a:r>
+            <a:r>
+              <a:rPr sz="2050" b="0">
+                <a:solidFill>
+                  <a:srgbClr val="067D17"/>
+                </a:solidFill>
+                <a:latin typeface="JetBrains Mono"/>
+                <a:ea typeface="JetBrains Mono"/>
+                <a:cs typeface="JetBrains Mono"/>
+              </a:rPr>
+              <a:t>"folder"</a:t>
+            </a:r>
+            <a:r>
+              <a:rPr sz="2400" b="0">
+                <a:solidFill>
+                  <a:srgbClr val="080808"/>
+                </a:solidFill>
+                <a:latin typeface="Calibri"/>
+                <a:ea typeface="Calibri"/>
+                <a:cs typeface="Calibri"/>
+              </a:rPr>
+              <a:t> and 1 display </a:t>
+            </a:r>
+            <a:r>
+              <a:rPr sz="2050" b="0">
                 <a:solidFill>
                   <a:srgbClr val="067D17"/>
                 </a:solidFill>
@@ -9106,7 +9156,7 @@
         </p:spPr>
         <p:txBody>
           <a:bodyPr xmlns:a="http://schemas.openxmlformats.org/drawingml/2006/main">
-            <a:normAutofit fontScale="87835"/>
+            <a:normAutofit fontScale="100000"/>
           </a:bodyPr>
           <a:lstStyle xmlns:a="http://schemas.openxmlformats.org/drawingml/2006/main"/>
           <a:p xmlns:a="http://schemas.openxmlformats.org/drawingml/2006/main">
@@ -9125,18 +9175,18 @@
                 <a:ea typeface="Calibri"/>
                 <a:cs typeface="Calibri"/>
               </a:rPr>
-              <a:t>Store </a:t>
-            </a:r>
-            <a:r>
-              <a:rPr sz="2400" b="0">
-                <a:solidFill>
-                  <a:srgbClr val="067D17"/>
-                </a:solidFill>
-                <a:latin typeface="JetBrains Mono"/>
-                <a:ea typeface="JetBrains Mono"/>
-                <a:cs typeface="JetBrains Mono"/>
-              </a:rPr>
-              <a:t>"Park"</a:t>
+              <a:t>Create a scoreboard </a:t>
+            </a:r>
+            <a:r>
+              <a:rPr sz="2050" b="0">
+                <a:solidFill>
+                  <a:srgbClr val="1750EB"/>
+                </a:solidFill>
+                <a:latin typeface="JetBrains Mono"/>
+                <a:ea typeface="JetBrains Mono"/>
+                <a:cs typeface="JetBrains Mono"/>
+              </a:rPr>
+              <a:t>list</a:t>
             </a:r>
             <a:r>
               <a:rPr sz="2400" b="0">
@@ -9147,18 +9197,21 @@
                 <a:ea typeface="Calibri"/>
                 <a:cs typeface="Calibri"/>
               </a:rPr>
-              <a:t>, </a:t>
-            </a:r>
-            <a:r>
-              <a:rPr sz="2400" b="0">
-                <a:solidFill>
-                  <a:srgbClr val="067D17"/>
-                </a:solidFill>
-                <a:latin typeface="JetBrains Mono"/>
-                <a:ea typeface="JetBrains Mono"/>
-                <a:cs typeface="JetBrains Mono"/>
-              </a:rPr>
-              <a:t>"Museum"</a:t>
+              <a:t> called </a:t>
+            </a:r>
+            <a:r>
+              <a:rPr sz="2050" b="0">
+                <a:solidFill>
+                  <a:srgbClr val="6A1B9A"/>
+                </a:solidFill>
+                <a:highlight>
+                  <a:srgbClr val="ECEAF4"/>
+                </a:highlight>
+                <a:latin typeface="JetBrains Mono"/>
+                <a:ea typeface="JetBrains Mono"/>
+                <a:cs typeface="JetBrains Mono"/>
+              </a:rPr>
+              <a:t> scores </a:t>
             </a:r>
             <a:r>
               <a:rPr sz="2400" b="0">
@@ -9169,18 +9222,18 @@
                 <a:ea typeface="Calibri"/>
                 <a:cs typeface="Calibri"/>
               </a:rPr>
-              <a:t> and </a:t>
-            </a:r>
-            <a:r>
-              <a:rPr sz="2400" b="0">
-                <a:solidFill>
-                  <a:srgbClr val="067D17"/>
-                </a:solidFill>
-                <a:latin typeface="JetBrains Mono"/>
-                <a:ea typeface="JetBrains Mono"/>
-                <a:cs typeface="JetBrains Mono"/>
-              </a:rPr>
-              <a:t>"Station"</a:t>
+              <a:t> holding 0, 0 and 0 for three teams. Twice, ask which team scored (0 to 2) and how many points, then add the points to that team's score. Display the </a:t>
+            </a:r>
+            <a:r>
+              <a:rPr sz="2050" b="0">
+                <a:solidFill>
+                  <a:srgbClr val="1750EB"/>
+                </a:solidFill>
+                <a:latin typeface="JetBrains Mono"/>
+                <a:ea typeface="JetBrains Mono"/>
+                <a:cs typeface="JetBrains Mono"/>
+              </a:rPr>
+              <a:t>list</a:t>
             </a:r>
             <a:r>
               <a:rPr sz="2400" b="0">
@@ -9191,18 +9244,18 @@
                 <a:ea typeface="Calibri"/>
                 <a:cs typeface="Calibri"/>
               </a:rPr>
-              <a:t> in a </a:t>
-            </a:r>
-            <a:r>
-              <a:rPr sz="2400" b="0">
-                <a:solidFill>
-                  <a:srgbClr val="1750EB"/>
-                </a:solidFill>
-                <a:latin typeface="JetBrains Mono"/>
-                <a:ea typeface="JetBrains Mono"/>
-                <a:cs typeface="JetBrains Mono"/>
-              </a:rPr>
-              <a:t>list</a:t>
+              <a:t> after </a:t>
+            </a:r>
+            <a:r>
+              <a:rPr sz="2050" b="0">
+                <a:solidFill>
+                  <a:srgbClr val="067D17"/>
+                </a:solidFill>
+                <a:latin typeface="JetBrains Mono"/>
+                <a:ea typeface="JetBrains Mono"/>
+                <a:cs typeface="JetBrains Mono"/>
+              </a:rPr>
+              <a:t>"Scores:"</a:t>
             </a:r>
             <a:r>
               <a:rPr sz="2400" b="0">
@@ -9213,10 +9266,10 @@
                 <a:ea typeface="Calibri"/>
                 <a:cs typeface="Calibri"/>
               </a:rPr>
-              <a:t> called [places]. Ask for a position from 0 to 2 and store it in [position]. Ask for a new place and store it in [new_place], then replace the item at [position]. Test position 1 and </a:t>
-            </a:r>
-            <a:r>
-              <a:rPr sz="2400" b="0">
+              <a:t>. For example, 1 and 3, then 1 and 2, display </a:t>
+            </a:r>
+            <a:r>
+              <a:rPr sz="2050" b="0">
                 <a:solidFill>
                   <a:srgbClr val="067D17"/>
                 </a:solidFill>
@@ -9224,51 +9277,7 @@
                 <a:ea typeface="JetBrains Mono"/>
                 <a:cs typeface="JetBrains Mono"/>
               </a:rPr>
-              <a:t>"Library"</a:t>
-            </a:r>
-            <a:r>
-              <a:rPr sz="2400" b="0">
-                <a:solidFill>
-                  <a:srgbClr val="080808"/>
-                </a:solidFill>
-                <a:latin typeface="Calibri"/>
-                <a:ea typeface="Calibri"/>
-                <a:cs typeface="Calibri"/>
-              </a:rPr>
-              <a:t>; display </a:t>
-            </a:r>
-            <a:r>
-              <a:rPr sz="2400" b="0">
-                <a:solidFill>
-                  <a:srgbClr val="067D17"/>
-                </a:solidFill>
-                <a:latin typeface="JetBrains Mono"/>
-                <a:ea typeface="JetBrains Mono"/>
-                <a:cs typeface="JetBrains Mono"/>
-              </a:rPr>
-              <a:t>"First stop: Park"</a:t>
-            </a:r>
-            <a:r>
-              <a:rPr sz="2400" b="0">
-                <a:solidFill>
-                  <a:srgbClr val="080808"/>
-                </a:solidFill>
-                <a:latin typeface="Calibri"/>
-                <a:ea typeface="Calibri"/>
-                <a:cs typeface="Calibri"/>
-              </a:rPr>
-              <a:t> and </a:t>
-            </a:r>
-            <a:r>
-              <a:rPr sz="2400" b="0">
-                <a:solidFill>
-                  <a:srgbClr val="067D17"/>
-                </a:solidFill>
-                <a:latin typeface="JetBrains Mono"/>
-                <a:ea typeface="JetBrains Mono"/>
-                <a:cs typeface="JetBrains Mono"/>
-              </a:rPr>
-              <a:t>"Updated places: ['Park', 'Library', 'Station']"</a:t>
+              <a:t>"Scores: [0, 5, 0]"</a:t>
             </a:r>
             <a:r>
               <a:rPr sz="2400" b="0">

--- a/Mapped Curriculum Lessons/Grade 7/Lesson 22 - List Positions and Updates/List Positions and Updates - Slides.pptx
+++ b/Mapped Curriculum Lessons/Grade 7/Lesson 22 - List Positions and Updates/List Positions and Updates - Slides.pptx
@@ -2,28 +2,28 @@
 <file path=ppt/presentation.xml><?xml version="1.0" encoding="utf-8"?>
 <p:presentation xmlns:p="http://schemas.openxmlformats.org/presentationml/2006/main" embedTrueTypeFonts="1" saveSubsetFonts="0">
   <p:sldMasterIdLst>
-    <p:sldMasterId xmlns:r="http://schemas.openxmlformats.org/officeDocument/2006/relationships" id="2147483648" r:id="R14f4e6c7c5c14406"/>
+    <p:sldMasterId xmlns:r="http://schemas.openxmlformats.org/officeDocument/2006/relationships" id="2147483648" r:id="Rc54d56f089f84474"/>
   </p:sldMasterIdLst>
   <p:notesMasterIdLst>
-    <p:notesMasterId xmlns:r="http://schemas.openxmlformats.org/officeDocument/2006/relationships" r:id="R41df40386e754bbf"/>
+    <p:notesMasterId xmlns:r="http://schemas.openxmlformats.org/officeDocument/2006/relationships" r:id="Ra5f0021ebbb44fae"/>
   </p:notesMasterIdLst>
   <p:sldIdLst>
-    <p:sldId xmlns:r="http://schemas.openxmlformats.org/officeDocument/2006/relationships" id="256" r:id="R1cd75144a33b4226"/>
-    <p:sldId xmlns:r="http://schemas.openxmlformats.org/officeDocument/2006/relationships" id="257" r:id="R23f5c9c9c62b4062"/>
-    <p:sldId xmlns:r="http://schemas.openxmlformats.org/officeDocument/2006/relationships" id="258" r:id="R0603302cb24b40f0"/>
-    <p:sldId xmlns:r="http://schemas.openxmlformats.org/officeDocument/2006/relationships" id="259" r:id="Rc158c9fe53e44e7f"/>
-    <p:sldId xmlns:r="http://schemas.openxmlformats.org/officeDocument/2006/relationships" id="260" r:id="R7daf0d6361b14185"/>
-    <p:sldId xmlns:r="http://schemas.openxmlformats.org/officeDocument/2006/relationships" id="261" r:id="R1ae47d4fa3154479"/>
-    <p:sldId xmlns:r="http://schemas.openxmlformats.org/officeDocument/2006/relationships" id="262" r:id="Rd52fa4fe2c1a44a4"/>
-    <p:sldId xmlns:r="http://schemas.openxmlformats.org/officeDocument/2006/relationships" id="263" r:id="Re8178cb01a1b4fd8"/>
-    <p:sldId xmlns:r="http://schemas.openxmlformats.org/officeDocument/2006/relationships" id="264" r:id="R81abd20d6dae4edb"/>
+    <p:sldId xmlns:r="http://schemas.openxmlformats.org/officeDocument/2006/relationships" id="256" r:id="Rd28140469c0b4948"/>
+    <p:sldId xmlns:r="http://schemas.openxmlformats.org/officeDocument/2006/relationships" id="257" r:id="R782e5a7335cb46e4"/>
+    <p:sldId xmlns:r="http://schemas.openxmlformats.org/officeDocument/2006/relationships" id="258" r:id="R18d738d8ea9d4196"/>
+    <p:sldId xmlns:r="http://schemas.openxmlformats.org/officeDocument/2006/relationships" id="259" r:id="R93bedb8fd89a4c5b"/>
+    <p:sldId xmlns:r="http://schemas.openxmlformats.org/officeDocument/2006/relationships" id="260" r:id="Ra5b628d181c94768"/>
+    <p:sldId xmlns:r="http://schemas.openxmlformats.org/officeDocument/2006/relationships" id="261" r:id="R0f215ca75f2f4613"/>
+    <p:sldId xmlns:r="http://schemas.openxmlformats.org/officeDocument/2006/relationships" id="262" r:id="Rc48db06efed64e18"/>
+    <p:sldId xmlns:r="http://schemas.openxmlformats.org/officeDocument/2006/relationships" id="263" r:id="R09dbd560202e4e78"/>
+    <p:sldId xmlns:r="http://schemas.openxmlformats.org/officeDocument/2006/relationships" id="264" r:id="R615bec0d0ff44970"/>
   </p:sldIdLst>
   <p:sldSz cx="12192000" cy="6858000"/>
   <p:notesSz cx="6858000" cy="9144000"/>
   <p:embeddedFontLst>
     <p:embeddedFont>
       <p:font typeface="JetBrains Mono"/>
-      <p:regular xmlns:r="http://schemas.openxmlformats.org/officeDocument/2006/relationships" r:id="Rd9baece58e92486c"/>
+      <p:regular xmlns:r="http://schemas.openxmlformats.org/officeDocument/2006/relationships" r:id="R1d4bab123aa54068"/>
     </p:embeddedFont>
   </p:embeddedFontLst>
 </p:presentation>
@@ -1071,7 +1071,7 @@
           <p:nvPr/>
         </p:nvPicPr>
         <p:blipFill rotWithShape="1">
-          <a:blip xmlns:r="http://schemas.openxmlformats.org/officeDocument/2006/relationships" xmlns:a="http://schemas.openxmlformats.org/drawingml/2006/main" r:embed="R72347039257e41c9"/>
+          <a:blip xmlns:r="http://schemas.openxmlformats.org/officeDocument/2006/relationships" xmlns:a="http://schemas.openxmlformats.org/drawingml/2006/main" r:embed="Rb5b6bad1020b4694"/>
           <a:stretch xmlns:a="http://schemas.openxmlformats.org/drawingml/2006/main"/>
         </p:blipFill>
         <p:spPr>
@@ -1451,7 +1451,7 @@
           <p:nvPr/>
         </p:nvPicPr>
         <p:blipFill rotWithShape="1">
-          <a:blip xmlns:r="http://schemas.openxmlformats.org/officeDocument/2006/relationships" xmlns:a="http://schemas.openxmlformats.org/drawingml/2006/main" r:embed="R85b43e171b0245d4">
+          <a:blip xmlns:r="http://schemas.openxmlformats.org/officeDocument/2006/relationships" xmlns:a="http://schemas.openxmlformats.org/drawingml/2006/main" r:embed="Re9df1a41646947da">
             <a:alphaModFix amt="28000"/>
           </a:blip>
           <a:stretch xmlns:a="http://schemas.openxmlformats.org/drawingml/2006/main"/>
@@ -1664,7 +1664,7 @@
           <p:nvPr/>
         </p:nvPicPr>
         <p:blipFill rotWithShape="1">
-          <a:blip xmlns:r="http://schemas.openxmlformats.org/officeDocument/2006/relationships" xmlns:a="http://schemas.openxmlformats.org/drawingml/2006/main" r:embed="Ra1bdd216f787469d">
+          <a:blip xmlns:r="http://schemas.openxmlformats.org/officeDocument/2006/relationships" xmlns:a="http://schemas.openxmlformats.org/drawingml/2006/main" r:embed="R05c75856be564c5a">
             <a:alphaModFix amt="28000"/>
           </a:blip>
           <a:stretch xmlns:a="http://schemas.openxmlformats.org/drawingml/2006/main"/>
@@ -1899,7 +1899,7 @@
           <p:nvPr/>
         </p:nvPicPr>
         <p:blipFill rotWithShape="1">
-          <a:blip xmlns:r="http://schemas.openxmlformats.org/officeDocument/2006/relationships" xmlns:a="http://schemas.openxmlformats.org/drawingml/2006/main" r:embed="R6fbfee92581c4022">
+          <a:blip xmlns:r="http://schemas.openxmlformats.org/officeDocument/2006/relationships" xmlns:a="http://schemas.openxmlformats.org/drawingml/2006/main" r:embed="R8ce9d33d85e144b4">
             <a:alphaModFix amt="28000"/>
           </a:blip>
           <a:stretch xmlns:a="http://schemas.openxmlformats.org/drawingml/2006/main"/>
@@ -2176,7 +2176,7 @@
           <p:nvPr/>
         </p:nvPicPr>
         <p:blipFill rotWithShape="1">
-          <a:blip xmlns:r="http://schemas.openxmlformats.org/officeDocument/2006/relationships" xmlns:a="http://schemas.openxmlformats.org/drawingml/2006/main" r:embed="R5f011038a60a429b">
+          <a:blip xmlns:r="http://schemas.openxmlformats.org/officeDocument/2006/relationships" xmlns:a="http://schemas.openxmlformats.org/drawingml/2006/main" r:embed="R300f0261d3c5451f">
             <a:alphaModFix amt="28000"/>
           </a:blip>
           <a:stretch xmlns:a="http://schemas.openxmlformats.org/drawingml/2006/main"/>
@@ -2451,7 +2451,7 @@
           <p:nvPr/>
         </p:nvPicPr>
         <p:blipFill rotWithShape="1">
-          <a:blip xmlns:r="http://schemas.openxmlformats.org/officeDocument/2006/relationships" xmlns:a="http://schemas.openxmlformats.org/drawingml/2006/main" r:embed="Rafa8e77224a84678">
+          <a:blip xmlns:r="http://schemas.openxmlformats.org/officeDocument/2006/relationships" xmlns:a="http://schemas.openxmlformats.org/drawingml/2006/main" r:embed="Rf793cca727154c26">
             <a:alphaModFix amt="28000"/>
           </a:blip>
           <a:stretch xmlns:a="http://schemas.openxmlformats.org/drawingml/2006/main"/>
@@ -2875,7 +2875,7 @@
           <p:nvPr/>
         </p:nvPicPr>
         <p:blipFill rotWithShape="1">
-          <a:blip xmlns:r="http://schemas.openxmlformats.org/officeDocument/2006/relationships" xmlns:a="http://schemas.openxmlformats.org/drawingml/2006/main" r:embed="R199b42aa227542b3">
+          <a:blip xmlns:r="http://schemas.openxmlformats.org/officeDocument/2006/relationships" xmlns:a="http://schemas.openxmlformats.org/drawingml/2006/main" r:embed="Re1f6a71be3844a11">
             <a:alphaModFix amt="28000"/>
           </a:blip>
           <a:stretch xmlns:a="http://schemas.openxmlformats.org/drawingml/2006/main"/>
@@ -3016,7 +3016,7 @@
           <p:nvPr/>
         </p:nvPicPr>
         <p:blipFill rotWithShape="1">
-          <a:blip xmlns:r="http://schemas.openxmlformats.org/officeDocument/2006/relationships" xmlns:a="http://schemas.openxmlformats.org/drawingml/2006/main" r:embed="R8eb95f6f93474df5">
+          <a:blip xmlns:r="http://schemas.openxmlformats.org/officeDocument/2006/relationships" xmlns:a="http://schemas.openxmlformats.org/drawingml/2006/main" r:embed="R042fd93781254324">
             <a:alphaModFix amt="28000"/>
           </a:blip>
           <a:stretch xmlns:a="http://schemas.openxmlformats.org/drawingml/2006/main"/>
@@ -3130,7 +3130,7 @@
           <p:nvPr/>
         </p:nvPicPr>
         <p:blipFill rotWithShape="1">
-          <a:blip xmlns:r="http://schemas.openxmlformats.org/officeDocument/2006/relationships" xmlns:a="http://schemas.openxmlformats.org/drawingml/2006/main" r:embed="Rf3b334b1f3bc42cf">
+          <a:blip xmlns:r="http://schemas.openxmlformats.org/officeDocument/2006/relationships" xmlns:a="http://schemas.openxmlformats.org/drawingml/2006/main" r:embed="Raf64e4cc029b46da">
             <a:alphaModFix amt="28000"/>
           </a:blip>
           <a:stretch xmlns:a="http://schemas.openxmlformats.org/drawingml/2006/main"/>
@@ -3457,7 +3457,7 @@
           <p:nvPr/>
         </p:nvPicPr>
         <p:blipFill rotWithShape="1">
-          <a:blip xmlns:r="http://schemas.openxmlformats.org/officeDocument/2006/relationships" xmlns:a="http://schemas.openxmlformats.org/drawingml/2006/main" r:embed="R1879daebd1814d47">
+          <a:blip xmlns:r="http://schemas.openxmlformats.org/officeDocument/2006/relationships" xmlns:a="http://schemas.openxmlformats.org/drawingml/2006/main" r:embed="Rcde9945a0aca4dac">
             <a:alphaModFix amt="28000"/>
           </a:blip>
           <a:stretch xmlns:a="http://schemas.openxmlformats.org/drawingml/2006/main"/>
@@ -3745,7 +3745,7 @@
           <p:nvPr/>
         </p:nvPicPr>
         <p:blipFill rotWithShape="1">
-          <a:blip xmlns:r="http://schemas.openxmlformats.org/officeDocument/2006/relationships" xmlns:a="http://schemas.openxmlformats.org/drawingml/2006/main" r:embed="R1368583d999c4637">
+          <a:blip xmlns:r="http://schemas.openxmlformats.org/officeDocument/2006/relationships" xmlns:a="http://schemas.openxmlformats.org/drawingml/2006/main" r:embed="R5a541eaac0c3420a">
             <a:alphaModFix amt="28000"/>
           </a:blip>
           <a:stretch xmlns:a="http://schemas.openxmlformats.org/drawingml/2006/main"/>
@@ -3982,17 +3982,17 @@
   </p:cSld>
   <p:clrMap bg1="lt1" tx1="dk1" bg2="lt2" tx2="dk2" accent1="accent1" accent2="accent2" accent3="accent3" accent4="accent4" accent5="accent5" accent6="accent6" hlink="hlink" folHlink="folHlink"/>
   <p:sldLayoutIdLst>
-    <p:sldLayoutId xmlns:r="http://schemas.openxmlformats.org/officeDocument/2006/relationships" id="2147483649" r:id="Rb6c2578ee87947d6"/>
-    <p:sldLayoutId xmlns:r="http://schemas.openxmlformats.org/officeDocument/2006/relationships" id="2147483650" r:id="R6d46856e58f14cf8"/>
-    <p:sldLayoutId xmlns:r="http://schemas.openxmlformats.org/officeDocument/2006/relationships" id="2147483651" r:id="Rb6ac4e85e05b4b45"/>
-    <p:sldLayoutId xmlns:r="http://schemas.openxmlformats.org/officeDocument/2006/relationships" id="2147483652" r:id="Rd06b2548dce6491e"/>
-    <p:sldLayoutId xmlns:r="http://schemas.openxmlformats.org/officeDocument/2006/relationships" id="2147483653" r:id="Raebd1171a7844c0c"/>
-    <p:sldLayoutId xmlns:r="http://schemas.openxmlformats.org/officeDocument/2006/relationships" id="2147483654" r:id="R303c45e560a84155"/>
-    <p:sldLayoutId xmlns:r="http://schemas.openxmlformats.org/officeDocument/2006/relationships" id="2147483655" r:id="R4f18e1043445493d"/>
-    <p:sldLayoutId xmlns:r="http://schemas.openxmlformats.org/officeDocument/2006/relationships" id="2147483656" r:id="R457e6110b81e4693"/>
-    <p:sldLayoutId xmlns:r="http://schemas.openxmlformats.org/officeDocument/2006/relationships" id="2147483657" r:id="R01ce513ed17b4388"/>
-    <p:sldLayoutId xmlns:r="http://schemas.openxmlformats.org/officeDocument/2006/relationships" id="2147483658" r:id="R8aaf379003484908"/>
-    <p:sldLayoutId xmlns:r="http://schemas.openxmlformats.org/officeDocument/2006/relationships" id="2147483659" r:id="Rcfc2c5e653c74783"/>
+    <p:sldLayoutId xmlns:r="http://schemas.openxmlformats.org/officeDocument/2006/relationships" id="2147483649" r:id="Re05bb4fc55864797"/>
+    <p:sldLayoutId xmlns:r="http://schemas.openxmlformats.org/officeDocument/2006/relationships" id="2147483650" r:id="Rb8fdbc8ad6c84689"/>
+    <p:sldLayoutId xmlns:r="http://schemas.openxmlformats.org/officeDocument/2006/relationships" id="2147483651" r:id="R6a1c7df476ab4c14"/>
+    <p:sldLayoutId xmlns:r="http://schemas.openxmlformats.org/officeDocument/2006/relationships" id="2147483652" r:id="Re232d0de781d422d"/>
+    <p:sldLayoutId xmlns:r="http://schemas.openxmlformats.org/officeDocument/2006/relationships" id="2147483653" r:id="R5ddfadd85ea24f27"/>
+    <p:sldLayoutId xmlns:r="http://schemas.openxmlformats.org/officeDocument/2006/relationships" id="2147483654" r:id="R2a633dd6afda404c"/>
+    <p:sldLayoutId xmlns:r="http://schemas.openxmlformats.org/officeDocument/2006/relationships" id="2147483655" r:id="Rbd43ceafe6134508"/>
+    <p:sldLayoutId xmlns:r="http://schemas.openxmlformats.org/officeDocument/2006/relationships" id="2147483656" r:id="R2d5368f0d5794c4e"/>
+    <p:sldLayoutId xmlns:r="http://schemas.openxmlformats.org/officeDocument/2006/relationships" id="2147483657" r:id="R3684eb074a3d4a4c"/>
+    <p:sldLayoutId xmlns:r="http://schemas.openxmlformats.org/officeDocument/2006/relationships" id="2147483658" r:id="R50b7cbac61e6450f"/>
+    <p:sldLayoutId xmlns:r="http://schemas.openxmlformats.org/officeDocument/2006/relationships" id="2147483659" r:id="R3d7ebc7ec0de45be"/>
   </p:sldLayoutIdLst>
   <p:hf hdr="0" ftr="0" dt="0"/>
   <p:txStyles>

--- a/Mapped Curriculum Lessons/Grade 7/Lesson 22 - List Positions and Updates/List Positions and Updates - Slides.pptx
+++ b/Mapped Curriculum Lessons/Grade 7/Lesson 22 - List Positions and Updates/List Positions and Updates - Slides.pptx
@@ -2,28 +2,28 @@
 <file path=ppt/presentation.xml><?xml version="1.0" encoding="utf-8"?>
 <p:presentation xmlns:p="http://schemas.openxmlformats.org/presentationml/2006/main" embedTrueTypeFonts="1" saveSubsetFonts="0">
   <p:sldMasterIdLst>
-    <p:sldMasterId xmlns:r="http://schemas.openxmlformats.org/officeDocument/2006/relationships" id="2147483648" r:id="Rc54d56f089f84474"/>
+    <p:sldMasterId xmlns:r="http://schemas.openxmlformats.org/officeDocument/2006/relationships" id="2147483648" r:id="Rf2eaf6f1deb04375"/>
   </p:sldMasterIdLst>
   <p:notesMasterIdLst>
-    <p:notesMasterId xmlns:r="http://schemas.openxmlformats.org/officeDocument/2006/relationships" r:id="Ra5f0021ebbb44fae"/>
+    <p:notesMasterId xmlns:r="http://schemas.openxmlformats.org/officeDocument/2006/relationships" r:id="R87a1eb6f593145aa"/>
   </p:notesMasterIdLst>
   <p:sldIdLst>
-    <p:sldId xmlns:r="http://schemas.openxmlformats.org/officeDocument/2006/relationships" id="256" r:id="Rd28140469c0b4948"/>
-    <p:sldId xmlns:r="http://schemas.openxmlformats.org/officeDocument/2006/relationships" id="257" r:id="R782e5a7335cb46e4"/>
-    <p:sldId xmlns:r="http://schemas.openxmlformats.org/officeDocument/2006/relationships" id="258" r:id="R18d738d8ea9d4196"/>
-    <p:sldId xmlns:r="http://schemas.openxmlformats.org/officeDocument/2006/relationships" id="259" r:id="R93bedb8fd89a4c5b"/>
-    <p:sldId xmlns:r="http://schemas.openxmlformats.org/officeDocument/2006/relationships" id="260" r:id="Ra5b628d181c94768"/>
-    <p:sldId xmlns:r="http://schemas.openxmlformats.org/officeDocument/2006/relationships" id="261" r:id="R0f215ca75f2f4613"/>
-    <p:sldId xmlns:r="http://schemas.openxmlformats.org/officeDocument/2006/relationships" id="262" r:id="Rc48db06efed64e18"/>
-    <p:sldId xmlns:r="http://schemas.openxmlformats.org/officeDocument/2006/relationships" id="263" r:id="R09dbd560202e4e78"/>
-    <p:sldId xmlns:r="http://schemas.openxmlformats.org/officeDocument/2006/relationships" id="264" r:id="R615bec0d0ff44970"/>
+    <p:sldId xmlns:r="http://schemas.openxmlformats.org/officeDocument/2006/relationships" id="256" r:id="Reb90abf677c5424a"/>
+    <p:sldId xmlns:r="http://schemas.openxmlformats.org/officeDocument/2006/relationships" id="257" r:id="Rfea35ec2673b4404"/>
+    <p:sldId xmlns:r="http://schemas.openxmlformats.org/officeDocument/2006/relationships" id="258" r:id="R173caa35d3fa4ada"/>
+    <p:sldId xmlns:r="http://schemas.openxmlformats.org/officeDocument/2006/relationships" id="259" r:id="R1af6c4619c724d48"/>
+    <p:sldId xmlns:r="http://schemas.openxmlformats.org/officeDocument/2006/relationships" id="260" r:id="R2397782c1b374383"/>
+    <p:sldId xmlns:r="http://schemas.openxmlformats.org/officeDocument/2006/relationships" id="261" r:id="R7f4842ae81a941cf"/>
+    <p:sldId xmlns:r="http://schemas.openxmlformats.org/officeDocument/2006/relationships" id="262" r:id="Rea2bc85038794d99"/>
+    <p:sldId xmlns:r="http://schemas.openxmlformats.org/officeDocument/2006/relationships" id="263" r:id="R45d108693b254b75"/>
+    <p:sldId xmlns:r="http://schemas.openxmlformats.org/officeDocument/2006/relationships" id="264" r:id="R56e2cf05c1b74bcc"/>
   </p:sldIdLst>
   <p:sldSz cx="12192000" cy="6858000"/>
   <p:notesSz cx="6858000" cy="9144000"/>
   <p:embeddedFontLst>
     <p:embeddedFont>
       <p:font typeface="JetBrains Mono"/>
-      <p:regular xmlns:r="http://schemas.openxmlformats.org/officeDocument/2006/relationships" r:id="R1d4bab123aa54068"/>
+      <p:regular xmlns:r="http://schemas.openxmlformats.org/officeDocument/2006/relationships" r:id="R829d3fe8029347da"/>
     </p:embeddedFont>
   </p:embeddedFontLst>
 </p:presentation>
@@ -1071,7 +1071,7 @@
           <p:nvPr/>
         </p:nvPicPr>
         <p:blipFill rotWithShape="1">
-          <a:blip xmlns:r="http://schemas.openxmlformats.org/officeDocument/2006/relationships" xmlns:a="http://schemas.openxmlformats.org/drawingml/2006/main" r:embed="Rb5b6bad1020b4694"/>
+          <a:blip xmlns:r="http://schemas.openxmlformats.org/officeDocument/2006/relationships" xmlns:a="http://schemas.openxmlformats.org/drawingml/2006/main" r:embed="Re857f3d8206c449c"/>
           <a:stretch xmlns:a="http://schemas.openxmlformats.org/drawingml/2006/main"/>
         </p:blipFill>
         <p:spPr>
@@ -1451,7 +1451,7 @@
           <p:nvPr/>
         </p:nvPicPr>
         <p:blipFill rotWithShape="1">
-          <a:blip xmlns:r="http://schemas.openxmlformats.org/officeDocument/2006/relationships" xmlns:a="http://schemas.openxmlformats.org/drawingml/2006/main" r:embed="Re9df1a41646947da">
+          <a:blip xmlns:r="http://schemas.openxmlformats.org/officeDocument/2006/relationships" xmlns:a="http://schemas.openxmlformats.org/drawingml/2006/main" r:embed="Rfab65e56baea46bb">
             <a:alphaModFix amt="28000"/>
           </a:blip>
           <a:stretch xmlns:a="http://schemas.openxmlformats.org/drawingml/2006/main"/>
@@ -1664,7 +1664,7 @@
           <p:nvPr/>
         </p:nvPicPr>
         <p:blipFill rotWithShape="1">
-          <a:blip xmlns:r="http://schemas.openxmlformats.org/officeDocument/2006/relationships" xmlns:a="http://schemas.openxmlformats.org/drawingml/2006/main" r:embed="R05c75856be564c5a">
+          <a:blip xmlns:r="http://schemas.openxmlformats.org/officeDocument/2006/relationships" xmlns:a="http://schemas.openxmlformats.org/drawingml/2006/main" r:embed="R7971601c6c8e4238">
             <a:alphaModFix amt="28000"/>
           </a:blip>
           <a:stretch xmlns:a="http://schemas.openxmlformats.org/drawingml/2006/main"/>
@@ -1899,7 +1899,7 @@
           <p:nvPr/>
         </p:nvPicPr>
         <p:blipFill rotWithShape="1">
-          <a:blip xmlns:r="http://schemas.openxmlformats.org/officeDocument/2006/relationships" xmlns:a="http://schemas.openxmlformats.org/drawingml/2006/main" r:embed="R8ce9d33d85e144b4">
+          <a:blip xmlns:r="http://schemas.openxmlformats.org/officeDocument/2006/relationships" xmlns:a="http://schemas.openxmlformats.org/drawingml/2006/main" r:embed="R15a73dc3042949a5">
             <a:alphaModFix amt="28000"/>
           </a:blip>
           <a:stretch xmlns:a="http://schemas.openxmlformats.org/drawingml/2006/main"/>
@@ -2176,7 +2176,7 @@
           <p:nvPr/>
         </p:nvPicPr>
         <p:blipFill rotWithShape="1">
-          <a:blip xmlns:r="http://schemas.openxmlformats.org/officeDocument/2006/relationships" xmlns:a="http://schemas.openxmlformats.org/drawingml/2006/main" r:embed="R300f0261d3c5451f">
+          <a:blip xmlns:r="http://schemas.openxmlformats.org/officeDocument/2006/relationships" xmlns:a="http://schemas.openxmlformats.org/drawingml/2006/main" r:embed="R26869d577e7f4d8b">
             <a:alphaModFix amt="28000"/>
           </a:blip>
           <a:stretch xmlns:a="http://schemas.openxmlformats.org/drawingml/2006/main"/>
@@ -2451,7 +2451,7 @@
           <p:nvPr/>
         </p:nvPicPr>
         <p:blipFill rotWithShape="1">
-          <a:blip xmlns:r="http://schemas.openxmlformats.org/officeDocument/2006/relationships" xmlns:a="http://schemas.openxmlformats.org/drawingml/2006/main" r:embed="Rf793cca727154c26">
+          <a:blip xmlns:r="http://schemas.openxmlformats.org/officeDocument/2006/relationships" xmlns:a="http://schemas.openxmlformats.org/drawingml/2006/main" r:embed="R94181534df4a4536">
             <a:alphaModFix amt="28000"/>
           </a:blip>
           <a:stretch xmlns:a="http://schemas.openxmlformats.org/drawingml/2006/main"/>
@@ -2875,7 +2875,7 @@
           <p:nvPr/>
         </p:nvPicPr>
         <p:blipFill rotWithShape="1">
-          <a:blip xmlns:r="http://schemas.openxmlformats.org/officeDocument/2006/relationships" xmlns:a="http://schemas.openxmlformats.org/drawingml/2006/main" r:embed="Re1f6a71be3844a11">
+          <a:blip xmlns:r="http://schemas.openxmlformats.org/officeDocument/2006/relationships" xmlns:a="http://schemas.openxmlformats.org/drawingml/2006/main" r:embed="Rc3e483da1dc6471f">
             <a:alphaModFix amt="28000"/>
           </a:blip>
           <a:stretch xmlns:a="http://schemas.openxmlformats.org/drawingml/2006/main"/>
@@ -3016,7 +3016,7 @@
           <p:nvPr/>
         </p:nvPicPr>
         <p:blipFill rotWithShape="1">
-          <a:blip xmlns:r="http://schemas.openxmlformats.org/officeDocument/2006/relationships" xmlns:a="http://schemas.openxmlformats.org/drawingml/2006/main" r:embed="R042fd93781254324">
+          <a:blip xmlns:r="http://schemas.openxmlformats.org/officeDocument/2006/relationships" xmlns:a="http://schemas.openxmlformats.org/drawingml/2006/main" r:embed="R42050990381948c5">
             <a:alphaModFix amt="28000"/>
           </a:blip>
           <a:stretch xmlns:a="http://schemas.openxmlformats.org/drawingml/2006/main"/>
@@ -3130,7 +3130,7 @@
           <p:nvPr/>
         </p:nvPicPr>
         <p:blipFill rotWithShape="1">
-          <a:blip xmlns:r="http://schemas.openxmlformats.org/officeDocument/2006/relationships" xmlns:a="http://schemas.openxmlformats.org/drawingml/2006/main" r:embed="Raf64e4cc029b46da">
+          <a:blip xmlns:r="http://schemas.openxmlformats.org/officeDocument/2006/relationships" xmlns:a="http://schemas.openxmlformats.org/drawingml/2006/main" r:embed="Rdd3a603e30284404">
             <a:alphaModFix amt="28000"/>
           </a:blip>
           <a:stretch xmlns:a="http://schemas.openxmlformats.org/drawingml/2006/main"/>
@@ -3457,7 +3457,7 @@
           <p:nvPr/>
         </p:nvPicPr>
         <p:blipFill rotWithShape="1">
-          <a:blip xmlns:r="http://schemas.openxmlformats.org/officeDocument/2006/relationships" xmlns:a="http://schemas.openxmlformats.org/drawingml/2006/main" r:embed="Rcde9945a0aca4dac">
+          <a:blip xmlns:r="http://schemas.openxmlformats.org/officeDocument/2006/relationships" xmlns:a="http://schemas.openxmlformats.org/drawingml/2006/main" r:embed="R5ce45461c4704cc7">
             <a:alphaModFix amt="28000"/>
           </a:blip>
           <a:stretch xmlns:a="http://schemas.openxmlformats.org/drawingml/2006/main"/>
@@ -3745,7 +3745,7 @@
           <p:nvPr/>
         </p:nvPicPr>
         <p:blipFill rotWithShape="1">
-          <a:blip xmlns:r="http://schemas.openxmlformats.org/officeDocument/2006/relationships" xmlns:a="http://schemas.openxmlformats.org/drawingml/2006/main" r:embed="R5a541eaac0c3420a">
+          <a:blip xmlns:r="http://schemas.openxmlformats.org/officeDocument/2006/relationships" xmlns:a="http://schemas.openxmlformats.org/drawingml/2006/main" r:embed="R734d4166c83c46f2">
             <a:alphaModFix amt="28000"/>
           </a:blip>
           <a:stretch xmlns:a="http://schemas.openxmlformats.org/drawingml/2006/main"/>
@@ -3982,17 +3982,17 @@
   </p:cSld>
   <p:clrMap bg1="lt1" tx1="dk1" bg2="lt2" tx2="dk2" accent1="accent1" accent2="accent2" accent3="accent3" accent4="accent4" accent5="accent5" accent6="accent6" hlink="hlink" folHlink="folHlink"/>
   <p:sldLayoutIdLst>
-    <p:sldLayoutId xmlns:r="http://schemas.openxmlformats.org/officeDocument/2006/relationships" id="2147483649" r:id="Re05bb4fc55864797"/>
-    <p:sldLayoutId xmlns:r="http://schemas.openxmlformats.org/officeDocument/2006/relationships" id="2147483650" r:id="Rb8fdbc8ad6c84689"/>
-    <p:sldLayoutId xmlns:r="http://schemas.openxmlformats.org/officeDocument/2006/relationships" id="2147483651" r:id="R6a1c7df476ab4c14"/>
-    <p:sldLayoutId xmlns:r="http://schemas.openxmlformats.org/officeDocument/2006/relationships" id="2147483652" r:id="Re232d0de781d422d"/>
-    <p:sldLayoutId xmlns:r="http://schemas.openxmlformats.org/officeDocument/2006/relationships" id="2147483653" r:id="R5ddfadd85ea24f27"/>
-    <p:sldLayoutId xmlns:r="http://schemas.openxmlformats.org/officeDocument/2006/relationships" id="2147483654" r:id="R2a633dd6afda404c"/>
-    <p:sldLayoutId xmlns:r="http://schemas.openxmlformats.org/officeDocument/2006/relationships" id="2147483655" r:id="Rbd43ceafe6134508"/>
-    <p:sldLayoutId xmlns:r="http://schemas.openxmlformats.org/officeDocument/2006/relationships" id="2147483656" r:id="R2d5368f0d5794c4e"/>
-    <p:sldLayoutId xmlns:r="http://schemas.openxmlformats.org/officeDocument/2006/relationships" id="2147483657" r:id="R3684eb074a3d4a4c"/>
-    <p:sldLayoutId xmlns:r="http://schemas.openxmlformats.org/officeDocument/2006/relationships" id="2147483658" r:id="R50b7cbac61e6450f"/>
-    <p:sldLayoutId xmlns:r="http://schemas.openxmlformats.org/officeDocument/2006/relationships" id="2147483659" r:id="R3d7ebc7ec0de45be"/>
+    <p:sldLayoutId xmlns:r="http://schemas.openxmlformats.org/officeDocument/2006/relationships" id="2147483649" r:id="R1691bddecd424e7e"/>
+    <p:sldLayoutId xmlns:r="http://schemas.openxmlformats.org/officeDocument/2006/relationships" id="2147483650" r:id="R19fb2bbd2f6742cb"/>
+    <p:sldLayoutId xmlns:r="http://schemas.openxmlformats.org/officeDocument/2006/relationships" id="2147483651" r:id="Rd879165affab49bc"/>
+    <p:sldLayoutId xmlns:r="http://schemas.openxmlformats.org/officeDocument/2006/relationships" id="2147483652" r:id="R7c585616c7b24319"/>
+    <p:sldLayoutId xmlns:r="http://schemas.openxmlformats.org/officeDocument/2006/relationships" id="2147483653" r:id="R02df9b0ee35b44fd"/>
+    <p:sldLayoutId xmlns:r="http://schemas.openxmlformats.org/officeDocument/2006/relationships" id="2147483654" r:id="R7227e1c7d41e4c5b"/>
+    <p:sldLayoutId xmlns:r="http://schemas.openxmlformats.org/officeDocument/2006/relationships" id="2147483655" r:id="Rd176e49bd0984750"/>
+    <p:sldLayoutId xmlns:r="http://schemas.openxmlformats.org/officeDocument/2006/relationships" id="2147483656" r:id="R8fc6b913c91440b2"/>
+    <p:sldLayoutId xmlns:r="http://schemas.openxmlformats.org/officeDocument/2006/relationships" id="2147483657" r:id="R9cb7eb97436f4a16"/>
+    <p:sldLayoutId xmlns:r="http://schemas.openxmlformats.org/officeDocument/2006/relationships" id="2147483658" r:id="Rd7b5766027b2487f"/>
+    <p:sldLayoutId xmlns:r="http://schemas.openxmlformats.org/officeDocument/2006/relationships" id="2147483659" r:id="Ra765acfe1683483e"/>
   </p:sldLayoutIdLst>
   <p:hf hdr="0" ftr="0" dt="0"/>
   <p:txStyles>

--- a/Mapped Curriculum Lessons/Grade 7/Lesson 22 - List Positions and Updates/List Positions and Updates - Slides.pptx
+++ b/Mapped Curriculum Lessons/Grade 7/Lesson 22 - List Positions and Updates/List Positions and Updates - Slides.pptx
@@ -2,28 +2,28 @@
 <file path=ppt/presentation.xml><?xml version="1.0" encoding="utf-8"?>
 <p:presentation xmlns:p="http://schemas.openxmlformats.org/presentationml/2006/main" embedTrueTypeFonts="1" saveSubsetFonts="0">
   <p:sldMasterIdLst>
-    <p:sldMasterId xmlns:r="http://schemas.openxmlformats.org/officeDocument/2006/relationships" id="2147483648" r:id="Rf2eaf6f1deb04375"/>
+    <p:sldMasterId xmlns:r="http://schemas.openxmlformats.org/officeDocument/2006/relationships" id="2147483648" r:id="R58a963ecc57e46d3"/>
   </p:sldMasterIdLst>
   <p:notesMasterIdLst>
-    <p:notesMasterId xmlns:r="http://schemas.openxmlformats.org/officeDocument/2006/relationships" r:id="R87a1eb6f593145aa"/>
+    <p:notesMasterId xmlns:r="http://schemas.openxmlformats.org/officeDocument/2006/relationships" r:id="R2d777916bcd446ec"/>
   </p:notesMasterIdLst>
   <p:sldIdLst>
-    <p:sldId xmlns:r="http://schemas.openxmlformats.org/officeDocument/2006/relationships" id="256" r:id="Reb90abf677c5424a"/>
-    <p:sldId xmlns:r="http://schemas.openxmlformats.org/officeDocument/2006/relationships" id="257" r:id="Rfea35ec2673b4404"/>
-    <p:sldId xmlns:r="http://schemas.openxmlformats.org/officeDocument/2006/relationships" id="258" r:id="R173caa35d3fa4ada"/>
-    <p:sldId xmlns:r="http://schemas.openxmlformats.org/officeDocument/2006/relationships" id="259" r:id="R1af6c4619c724d48"/>
-    <p:sldId xmlns:r="http://schemas.openxmlformats.org/officeDocument/2006/relationships" id="260" r:id="R2397782c1b374383"/>
-    <p:sldId xmlns:r="http://schemas.openxmlformats.org/officeDocument/2006/relationships" id="261" r:id="R7f4842ae81a941cf"/>
-    <p:sldId xmlns:r="http://schemas.openxmlformats.org/officeDocument/2006/relationships" id="262" r:id="Rea2bc85038794d99"/>
-    <p:sldId xmlns:r="http://schemas.openxmlformats.org/officeDocument/2006/relationships" id="263" r:id="R45d108693b254b75"/>
-    <p:sldId xmlns:r="http://schemas.openxmlformats.org/officeDocument/2006/relationships" id="264" r:id="R56e2cf05c1b74bcc"/>
+    <p:sldId xmlns:r="http://schemas.openxmlformats.org/officeDocument/2006/relationships" id="256" r:id="Re783a5e8484e48bf"/>
+    <p:sldId xmlns:r="http://schemas.openxmlformats.org/officeDocument/2006/relationships" id="257" r:id="R0023ab6417d64a8f"/>
+    <p:sldId xmlns:r="http://schemas.openxmlformats.org/officeDocument/2006/relationships" id="258" r:id="R115216d327b8499b"/>
+    <p:sldId xmlns:r="http://schemas.openxmlformats.org/officeDocument/2006/relationships" id="259" r:id="R0fe96d52705c4421"/>
+    <p:sldId xmlns:r="http://schemas.openxmlformats.org/officeDocument/2006/relationships" id="260" r:id="R5e019c292e374cfa"/>
+    <p:sldId xmlns:r="http://schemas.openxmlformats.org/officeDocument/2006/relationships" id="261" r:id="R7bc0720df9e44116"/>
+    <p:sldId xmlns:r="http://schemas.openxmlformats.org/officeDocument/2006/relationships" id="262" r:id="R29b279fdf8a4420b"/>
+    <p:sldId xmlns:r="http://schemas.openxmlformats.org/officeDocument/2006/relationships" id="263" r:id="R188a26c001144a87"/>
+    <p:sldId xmlns:r="http://schemas.openxmlformats.org/officeDocument/2006/relationships" id="264" r:id="Rba1403ade6d046d3"/>
   </p:sldIdLst>
   <p:sldSz cx="12192000" cy="6858000"/>
   <p:notesSz cx="6858000" cy="9144000"/>
   <p:embeddedFontLst>
     <p:embeddedFont>
       <p:font typeface="JetBrains Mono"/>
-      <p:regular xmlns:r="http://schemas.openxmlformats.org/officeDocument/2006/relationships" r:id="R829d3fe8029347da"/>
+      <p:regular xmlns:r="http://schemas.openxmlformats.org/officeDocument/2006/relationships" r:id="R84d996f533ae45bd"/>
     </p:embeddedFont>
   </p:embeddedFontLst>
 </p:presentation>
@@ -1071,7 +1071,7 @@
           <p:nvPr/>
         </p:nvPicPr>
         <p:blipFill rotWithShape="1">
-          <a:blip xmlns:r="http://schemas.openxmlformats.org/officeDocument/2006/relationships" xmlns:a="http://schemas.openxmlformats.org/drawingml/2006/main" r:embed="Re857f3d8206c449c"/>
+          <a:blip xmlns:r="http://schemas.openxmlformats.org/officeDocument/2006/relationships" xmlns:a="http://schemas.openxmlformats.org/drawingml/2006/main" r:embed="R0cfee9ba42784dfd"/>
           <a:stretch xmlns:a="http://schemas.openxmlformats.org/drawingml/2006/main"/>
         </p:blipFill>
         <p:spPr>
@@ -1451,7 +1451,7 @@
           <p:nvPr/>
         </p:nvPicPr>
         <p:blipFill rotWithShape="1">
-          <a:blip xmlns:r="http://schemas.openxmlformats.org/officeDocument/2006/relationships" xmlns:a="http://schemas.openxmlformats.org/drawingml/2006/main" r:embed="Rfab65e56baea46bb">
+          <a:blip xmlns:r="http://schemas.openxmlformats.org/officeDocument/2006/relationships" xmlns:a="http://schemas.openxmlformats.org/drawingml/2006/main" r:embed="Rb39827d1daef4978">
             <a:alphaModFix amt="28000"/>
           </a:blip>
           <a:stretch xmlns:a="http://schemas.openxmlformats.org/drawingml/2006/main"/>
@@ -1664,7 +1664,7 @@
           <p:nvPr/>
         </p:nvPicPr>
         <p:blipFill rotWithShape="1">
-          <a:blip xmlns:r="http://schemas.openxmlformats.org/officeDocument/2006/relationships" xmlns:a="http://schemas.openxmlformats.org/drawingml/2006/main" r:embed="R7971601c6c8e4238">
+          <a:blip xmlns:r="http://schemas.openxmlformats.org/officeDocument/2006/relationships" xmlns:a="http://schemas.openxmlformats.org/drawingml/2006/main" r:embed="Rf8bf0f14a40143d0">
             <a:alphaModFix amt="28000"/>
           </a:blip>
           <a:stretch xmlns:a="http://schemas.openxmlformats.org/drawingml/2006/main"/>
@@ -1899,7 +1899,7 @@
           <p:nvPr/>
         </p:nvPicPr>
         <p:blipFill rotWithShape="1">
-          <a:blip xmlns:r="http://schemas.openxmlformats.org/officeDocument/2006/relationships" xmlns:a="http://schemas.openxmlformats.org/drawingml/2006/main" r:embed="R15a73dc3042949a5">
+          <a:blip xmlns:r="http://schemas.openxmlformats.org/officeDocument/2006/relationships" xmlns:a="http://schemas.openxmlformats.org/drawingml/2006/main" r:embed="Rc51a95c530bd41bf">
             <a:alphaModFix amt="28000"/>
           </a:blip>
           <a:stretch xmlns:a="http://schemas.openxmlformats.org/drawingml/2006/main"/>
@@ -2176,7 +2176,7 @@
           <p:nvPr/>
         </p:nvPicPr>
         <p:blipFill rotWithShape="1">
-          <a:blip xmlns:r="http://schemas.openxmlformats.org/officeDocument/2006/relationships" xmlns:a="http://schemas.openxmlformats.org/drawingml/2006/main" r:embed="R26869d577e7f4d8b">
+          <a:blip xmlns:r="http://schemas.openxmlformats.org/officeDocument/2006/relationships" xmlns:a="http://schemas.openxmlformats.org/drawingml/2006/main" r:embed="R522dd82e76de4050">
             <a:alphaModFix amt="28000"/>
           </a:blip>
           <a:stretch xmlns:a="http://schemas.openxmlformats.org/drawingml/2006/main"/>
@@ -2451,7 +2451,7 @@
           <p:nvPr/>
         </p:nvPicPr>
         <p:blipFill rotWithShape="1">
-          <a:blip xmlns:r="http://schemas.openxmlformats.org/officeDocument/2006/relationships" xmlns:a="http://schemas.openxmlformats.org/drawingml/2006/main" r:embed="R94181534df4a4536">
+          <a:blip xmlns:r="http://schemas.openxmlformats.org/officeDocument/2006/relationships" xmlns:a="http://schemas.openxmlformats.org/drawingml/2006/main" r:embed="R574bdc0827f444d3">
             <a:alphaModFix amt="28000"/>
           </a:blip>
           <a:stretch xmlns:a="http://schemas.openxmlformats.org/drawingml/2006/main"/>
@@ -2875,7 +2875,7 @@
           <p:nvPr/>
         </p:nvPicPr>
         <p:blipFill rotWithShape="1">
-          <a:blip xmlns:r="http://schemas.openxmlformats.org/officeDocument/2006/relationships" xmlns:a="http://schemas.openxmlformats.org/drawingml/2006/main" r:embed="Rc3e483da1dc6471f">
+          <a:blip xmlns:r="http://schemas.openxmlformats.org/officeDocument/2006/relationships" xmlns:a="http://schemas.openxmlformats.org/drawingml/2006/main" r:embed="R03fa1b49866a4783">
             <a:alphaModFix amt="28000"/>
           </a:blip>
           <a:stretch xmlns:a="http://schemas.openxmlformats.org/drawingml/2006/main"/>
@@ -3016,7 +3016,7 @@
           <p:nvPr/>
         </p:nvPicPr>
         <p:blipFill rotWithShape="1">
-          <a:blip xmlns:r="http://schemas.openxmlformats.org/officeDocument/2006/relationships" xmlns:a="http://schemas.openxmlformats.org/drawingml/2006/main" r:embed="R42050990381948c5">
+          <a:blip xmlns:r="http://schemas.openxmlformats.org/officeDocument/2006/relationships" xmlns:a="http://schemas.openxmlformats.org/drawingml/2006/main" r:embed="Rc5a91c71977f4714">
             <a:alphaModFix amt="28000"/>
           </a:blip>
           <a:stretch xmlns:a="http://schemas.openxmlformats.org/drawingml/2006/main"/>
@@ -3130,7 +3130,7 @@
           <p:nvPr/>
         </p:nvPicPr>
         <p:blipFill rotWithShape="1">
-          <a:blip xmlns:r="http://schemas.openxmlformats.org/officeDocument/2006/relationships" xmlns:a="http://schemas.openxmlformats.org/drawingml/2006/main" r:embed="Rdd3a603e30284404">
+          <a:blip xmlns:r="http://schemas.openxmlformats.org/officeDocument/2006/relationships" xmlns:a="http://schemas.openxmlformats.org/drawingml/2006/main" r:embed="Rfcc91919e43948a5">
             <a:alphaModFix amt="28000"/>
           </a:blip>
           <a:stretch xmlns:a="http://schemas.openxmlformats.org/drawingml/2006/main"/>
@@ -3457,7 +3457,7 @@
           <p:nvPr/>
         </p:nvPicPr>
         <p:blipFill rotWithShape="1">
-          <a:blip xmlns:r="http://schemas.openxmlformats.org/officeDocument/2006/relationships" xmlns:a="http://schemas.openxmlformats.org/drawingml/2006/main" r:embed="R5ce45461c4704cc7">
+          <a:blip xmlns:r="http://schemas.openxmlformats.org/officeDocument/2006/relationships" xmlns:a="http://schemas.openxmlformats.org/drawingml/2006/main" r:embed="Rbbac5d369f404b14">
             <a:alphaModFix amt="28000"/>
           </a:blip>
           <a:stretch xmlns:a="http://schemas.openxmlformats.org/drawingml/2006/main"/>
@@ -3745,7 +3745,7 @@
           <p:nvPr/>
         </p:nvPicPr>
         <p:blipFill rotWithShape="1">
-          <a:blip xmlns:r="http://schemas.openxmlformats.org/officeDocument/2006/relationships" xmlns:a="http://schemas.openxmlformats.org/drawingml/2006/main" r:embed="R734d4166c83c46f2">
+          <a:blip xmlns:r="http://schemas.openxmlformats.org/officeDocument/2006/relationships" xmlns:a="http://schemas.openxmlformats.org/drawingml/2006/main" r:embed="R0fde47e598ce4099">
             <a:alphaModFix amt="28000"/>
           </a:blip>
           <a:stretch xmlns:a="http://schemas.openxmlformats.org/drawingml/2006/main"/>
@@ -3982,17 +3982,17 @@
   </p:cSld>
   <p:clrMap bg1="lt1" tx1="dk1" bg2="lt2" tx2="dk2" accent1="accent1" accent2="accent2" accent3="accent3" accent4="accent4" accent5="accent5" accent6="accent6" hlink="hlink" folHlink="folHlink"/>
   <p:sldLayoutIdLst>
-    <p:sldLayoutId xmlns:r="http://schemas.openxmlformats.org/officeDocument/2006/relationships" id="2147483649" r:id="R1691bddecd424e7e"/>
-    <p:sldLayoutId xmlns:r="http://schemas.openxmlformats.org/officeDocument/2006/relationships" id="2147483650" r:id="R19fb2bbd2f6742cb"/>
-    <p:sldLayoutId xmlns:r="http://schemas.openxmlformats.org/officeDocument/2006/relationships" id="2147483651" r:id="Rd879165affab49bc"/>
-    <p:sldLayoutId xmlns:r="http://schemas.openxmlformats.org/officeDocument/2006/relationships" id="2147483652" r:id="R7c585616c7b24319"/>
-    <p:sldLayoutId xmlns:r="http://schemas.openxmlformats.org/officeDocument/2006/relationships" id="2147483653" r:id="R02df9b0ee35b44fd"/>
-    <p:sldLayoutId xmlns:r="http://schemas.openxmlformats.org/officeDocument/2006/relationships" id="2147483654" r:id="R7227e1c7d41e4c5b"/>
-    <p:sldLayoutId xmlns:r="http://schemas.openxmlformats.org/officeDocument/2006/relationships" id="2147483655" r:id="Rd176e49bd0984750"/>
-    <p:sldLayoutId xmlns:r="http://schemas.openxmlformats.org/officeDocument/2006/relationships" id="2147483656" r:id="R8fc6b913c91440b2"/>
-    <p:sldLayoutId xmlns:r="http://schemas.openxmlformats.org/officeDocument/2006/relationships" id="2147483657" r:id="R9cb7eb97436f4a16"/>
-    <p:sldLayoutId xmlns:r="http://schemas.openxmlformats.org/officeDocument/2006/relationships" id="2147483658" r:id="Rd7b5766027b2487f"/>
-    <p:sldLayoutId xmlns:r="http://schemas.openxmlformats.org/officeDocument/2006/relationships" id="2147483659" r:id="Ra765acfe1683483e"/>
+    <p:sldLayoutId xmlns:r="http://schemas.openxmlformats.org/officeDocument/2006/relationships" id="2147483649" r:id="R5d01b03924fa4ceb"/>
+    <p:sldLayoutId xmlns:r="http://schemas.openxmlformats.org/officeDocument/2006/relationships" id="2147483650" r:id="Re3f11e30a6f24aba"/>
+    <p:sldLayoutId xmlns:r="http://schemas.openxmlformats.org/officeDocument/2006/relationships" id="2147483651" r:id="Rff41a4f7cae7400b"/>
+    <p:sldLayoutId xmlns:r="http://schemas.openxmlformats.org/officeDocument/2006/relationships" id="2147483652" r:id="R68ca4a8621104a14"/>
+    <p:sldLayoutId xmlns:r="http://schemas.openxmlformats.org/officeDocument/2006/relationships" id="2147483653" r:id="R1dcfdc10a90f4cba"/>
+    <p:sldLayoutId xmlns:r="http://schemas.openxmlformats.org/officeDocument/2006/relationships" id="2147483654" r:id="R0ee3df681c124a54"/>
+    <p:sldLayoutId xmlns:r="http://schemas.openxmlformats.org/officeDocument/2006/relationships" id="2147483655" r:id="Rb954bc8cfa084c32"/>
+    <p:sldLayoutId xmlns:r="http://schemas.openxmlformats.org/officeDocument/2006/relationships" id="2147483656" r:id="Raa7d493219b241e2"/>
+    <p:sldLayoutId xmlns:r="http://schemas.openxmlformats.org/officeDocument/2006/relationships" id="2147483657" r:id="R8513082f21d64db7"/>
+    <p:sldLayoutId xmlns:r="http://schemas.openxmlformats.org/officeDocument/2006/relationships" id="2147483658" r:id="R443a3064e69146c0"/>
+    <p:sldLayoutId xmlns:r="http://schemas.openxmlformats.org/officeDocument/2006/relationships" id="2147483659" r:id="Ree650a7ddaf4455c"/>
   </p:sldLayoutIdLst>
   <p:hf hdr="0" ftr="0" dt="0"/>
   <p:txStyles>
